--- a/Presentation.pptx
+++ b/Presentation.pptx
@@ -26,6 +26,9 @@
     <p:sldId id="274" r:id="rId25"/>
     <p:sldId id="275" r:id="rId26"/>
     <p:sldId id="276" r:id="rId27"/>
+    <p:sldId id="277" r:id="rId28"/>
+    <p:sldId id="278" r:id="rId29"/>
+    <p:sldId id="279" r:id="rId30"/>
   </p:sldIdLst>
   <p:sldSz cx="12191695" cy="6858000" type="screen4x3"/>
   <p:notesSz cx="6858000" cy="9144000"/>
@@ -3938,7 +3941,7 @@
                 </a:solidFill>
                 <a:latin typeface="Calibri"/>
               </a:rPr>
-              <a:t>Summary across 22 configs x 5 trials</a:t>
+              <a:t>Summary across 21 configs x 50 trials (100-word run)</a:t>
             </a:r>
           </a:p>
         </p:txBody>
@@ -3973,7 +3976,7 @@
                 </a:solidFill>
                 <a:latin typeface="Calibri"/>
               </a:rPr>
-              <a:t>Three clean groups: hard stoppers, slow-downs, and one probabilistic outcome</a:t>
+              <a:t>Three regimes: hard block, lottery window, slow-down only</a:t>
             </a:r>
           </a:p>
         </p:txBody>
@@ -4032,7 +4035,7 @@
                 </a:solidFill>
                 <a:latin typeface="Calibri"/>
               </a:rPr>
-              <a:t>Always blocked (0%)</a:t>
+              <a:t>Hard block (0%)</a:t>
             </a:r>
           </a:p>
         </p:txBody>
@@ -4046,7 +4049,7 @@
         <p:spPr>
           <a:xfrm>
             <a:off x="7498079" y="2194560"/>
-            <a:ext cx="4389120" cy="457200"/>
+            <a:ext cx="4389120" cy="548640"/>
           </a:xfrm>
           <a:prstGeom prst="rect">
             <a:avLst/>
@@ -4067,7 +4070,7 @@
                 </a:solidFill>
                 <a:latin typeface="Calibri"/>
               </a:rPr>
-              <a:t>11 of 22 configs - every trial stopped.</a:t>
+              <a:t>3 of 21: defense fires from request 1 (honeypot, anomaly, exp-backoff).</a:t>
             </a:r>
           </a:p>
         </p:txBody>
@@ -4098,11 +4101,11 @@
             <a:r>
               <a:rPr sz="1800" b="1">
                 <a:solidFill>
-                  <a:srgbClr val="D33636"/>
-                </a:solidFill>
-                <a:latin typeface="Calibri"/>
-              </a:rPr>
-              <a:t>Always breached (100%)</a:t>
+                  <a:srgbClr val="C87A00"/>
+                </a:solidFill>
+                <a:latin typeface="Calibri"/>
+              </a:rPr>
+              <a:t>Lottery window (2-4%)</a:t>
             </a:r>
           </a:p>
         </p:txBody>
@@ -4116,7 +4119,7 @@
         <p:spPr>
           <a:xfrm>
             <a:off x="7498079" y="3383280"/>
-            <a:ext cx="4389120" cy="457200"/>
+            <a:ext cx="4389120" cy="640080"/>
           </a:xfrm>
           <a:prstGeom prst="rect">
             <a:avLst/>
@@ -4137,7 +4140,7 @@
                 </a:solidFill>
                 <a:latin typeface="Calibri"/>
               </a:rPr>
-              <a:t>10 of 22 - defense was a slow-down only.</a:t>
+              <a:t>8 of 21: gated on N=5 fails - breach when password lands in attempts 1-5.</a:t>
             </a:r>
           </a:p>
         </p:txBody>
@@ -4150,7 +4153,7 @@
         </p:nvSpPr>
         <p:spPr>
           <a:xfrm>
-            <a:off x="7498079" y="4114800"/>
+            <a:off x="7498079" y="4297680"/>
             <a:ext cx="4389120" cy="457200"/>
           </a:xfrm>
           <a:prstGeom prst="rect">
@@ -4168,11 +4171,11 @@
             <a:r>
               <a:rPr sz="1800" b="1">
                 <a:solidFill>
-                  <a:srgbClr val="C87A00"/>
-                </a:solidFill>
-                <a:latin typeface="Calibri"/>
-              </a:rPr>
-              <a:t>Probabilistic (80%)</a:t>
+                  <a:srgbClr val="D33636"/>
+                </a:solidFill>
+                <a:latin typeface="Calibri"/>
+              </a:rPr>
+              <a:t>Slow-down only (100%)</a:t>
             </a:r>
           </a:p>
         </p:txBody>
@@ -4185,8 +4188,8 @@
         </p:nvSpPr>
         <p:spPr>
           <a:xfrm>
-            <a:off x="7498079" y="4572000"/>
-            <a:ext cx="4389120" cy="457200"/>
+            <a:off x="7498079" y="4754880"/>
+            <a:ext cx="4389120" cy="548640"/>
           </a:xfrm>
           <a:prstGeom prst="rect">
             <a:avLst/>
@@ -4207,7 +4210,77 @@
                 </a:solidFill>
                 <a:latin typeface="Calibri"/>
               </a:rPr>
-              <a:t>F2_pow_22bit - solver sometimes timed out.</a:t>
+              <a:t>9 of 21: attacker waits, password comes out every trial.</a:t>
+            </a:r>
+          </a:p>
+        </p:txBody>
+      </p:sp>
+      <p:sp>
+        <p:nvSpPr>
+          <p:cNvPr id="12" name="TextBox 11"/>
+          <p:cNvSpPr txBox="1"/>
+          <p:nvPr/>
+        </p:nvSpPr>
+        <p:spPr>
+          <a:xfrm>
+            <a:off x="7498079" y="5486400"/>
+            <a:ext cx="4389120" cy="457200"/>
+          </a:xfrm>
+          <a:prstGeom prst="rect">
+            <a:avLst/>
+          </a:prstGeom>
+          <a:noFill/>
+        </p:spPr>
+        <p:txBody>
+          <a:bodyPr wrap="square" anchor="t" lIns="0" rIns="0" tIns="0" bIns="0">
+            <a:spAutoFit/>
+          </a:bodyPr>
+          <a:lstStyle/>
+          <a:p>
+            <a:pPr algn="l"/>
+            <a:r>
+              <a:rPr sz="1800" b="1">
+                <a:solidFill>
+                  <a:srgbClr val="C87A00"/>
+                </a:solidFill>
+                <a:latin typeface="Calibri"/>
+              </a:rPr>
+              <a:t>Probabilistic (82%)</a:t>
+            </a:r>
+          </a:p>
+        </p:txBody>
+      </p:sp>
+      <p:sp>
+        <p:nvSpPr>
+          <p:cNvPr id="13" name="TextBox 12"/>
+          <p:cNvSpPr txBox="1"/>
+          <p:nvPr/>
+        </p:nvSpPr>
+        <p:spPr>
+          <a:xfrm>
+            <a:off x="7498079" y="5943600"/>
+            <a:ext cx="4389120" cy="457200"/>
+          </a:xfrm>
+          <a:prstGeom prst="rect">
+            <a:avLst/>
+          </a:prstGeom>
+          <a:noFill/>
+        </p:spPr>
+        <p:txBody>
+          <a:bodyPr wrap="square" anchor="t" lIns="0" rIns="0" tIns="0" bIns="0">
+            <a:spAutoFit/>
+          </a:bodyPr>
+          <a:lstStyle/>
+          <a:p>
+            <a:pPr algn="l"/>
+            <a:r>
+              <a:rPr sz="1300" b="0">
+                <a:solidFill>
+                  <a:srgbClr val="1F1F1F"/>
+                </a:solidFill>
+                <a:latin typeface="Calibri"/>
+              </a:rPr>
+              <a:t>F2_pow_22bit - solver sometimes blew its budget.</a:t>
             </a:r>
           </a:p>
         </p:txBody>
@@ -4303,7 +4376,7 @@
                 </a:solidFill>
                 <a:latin typeface="Calibri"/>
               </a:rPr>
-              <a:t>Hard stoppers</a:t>
+              <a:t>Hard block (0% breach in 50 trials)</a:t>
             </a:r>
           </a:p>
         </p:txBody>
@@ -4338,7 +4411,1642 @@
                 </a:solidFill>
                 <a:latin typeface="Calibri"/>
               </a:rPr>
-              <a:t>Every trial: attacker exhausted wordlist without a hit</a:t>
+              <a:t>Defense fires from request 1 - attacker never gets a foothold</a:t>
+            </a:r>
+          </a:p>
+        </p:txBody>
+      </p:sp>
+      <p:graphicFrame>
+        <p:nvGraphicFramePr>
+          <p:cNvPr id="5" name="Table 4"/>
+          <p:cNvGraphicFramePr>
+            <a:graphicFrameLocks noGrp="1"/>
+          </p:cNvGraphicFramePr>
+          <p:nvPr/>
+        </p:nvGraphicFramePr>
+        <p:xfrm>
+          <a:off x="457200" y="1554480"/>
+          <a:ext cx="11277295" cy="1828800"/>
+        </p:xfrm>
+        <a:graphic>
+          <a:graphicData uri="http://schemas.openxmlformats.org/drawingml/2006/table">
+            <a:tbl>
+              <a:tblPr firstRow="1" bandRow="1">
+                <a:tableStyleId>{5C22544A-7EE6-4342-B048-85BDC9FD1C3A}</a:tableStyleId>
+              </a:tblPr>
+              <a:tblGrid>
+                <a:gridCol w="3759098"/>
+                <a:gridCol w="3759098"/>
+                <a:gridCol w="3759099"/>
+              </a:tblGrid>
+              <a:tr h="457200">
+                <a:tc>
+                  <a:txBody>
+                    <a:bodyPr/>
+                    <a:lstStyle/>
+                    <a:p>
+                      <a:pPr algn="l"/>
+                      <a:r>
+                        <a:rPr sz="1500" b="1">
+                          <a:solidFill>
+                            <a:srgbClr val="FFFFFF"/>
+                          </a:solidFill>
+                          <a:latin typeface="Calibri"/>
+                        </a:rPr>
+                        <a:t>Config</a:t>
+                      </a:r>
+                    </a:p>
+                  </a:txBody>
+                  <a:tcPr>
+                    <a:solidFill>
+                      <a:srgbClr val="1A3B5C"/>
+                    </a:solidFill>
+                  </a:tcPr>
+                </a:tc>
+                <a:tc>
+                  <a:txBody>
+                    <a:bodyPr/>
+                    <a:lstStyle/>
+                    <a:p>
+                      <a:pPr algn="l"/>
+                      <a:r>
+                        <a:rPr sz="1500" b="1">
+                          <a:solidFill>
+                            <a:srgbClr val="FFFFFF"/>
+                          </a:solidFill>
+                          <a:latin typeface="Calibri"/>
+                        </a:rPr>
+                        <a:t>Median elapsed</a:t>
+                      </a:r>
+                    </a:p>
+                  </a:txBody>
+                  <a:tcPr>
+                    <a:solidFill>
+                      <a:srgbClr val="1A3B5C"/>
+                    </a:solidFill>
+                  </a:tcPr>
+                </a:tc>
+                <a:tc>
+                  <a:txBody>
+                    <a:bodyPr/>
+                    <a:lstStyle/>
+                    <a:p>
+                      <a:pPr algn="l"/>
+                      <a:r>
+                        <a:rPr sz="1500" b="1">
+                          <a:solidFill>
+                            <a:srgbClr val="FFFFFF"/>
+                          </a:solidFill>
+                          <a:latin typeface="Calibri"/>
+                        </a:rPr>
+                        <a:t>Why it blocks instantly</a:t>
+                      </a:r>
+                    </a:p>
+                  </a:txBody>
+                  <a:tcPr>
+                    <a:solidFill>
+                      <a:srgbClr val="1A3B5C"/>
+                    </a:solidFill>
+                  </a:tcPr>
+                </a:tc>
+              </a:tr>
+              <a:tr h="457200">
+                <a:tc>
+                  <a:txBody>
+                    <a:bodyPr/>
+                    <a:lstStyle/>
+                    <a:p>
+                      <a:pPr algn="l"/>
+                      <a:r>
+                        <a:rPr sz="1500">
+                          <a:solidFill>
+                            <a:srgbClr val="1A3B5C"/>
+                          </a:solidFill>
+                          <a:latin typeface="Calibri"/>
+                        </a:rPr>
+                        <a:t>L_honeypot_username</a:t>
+                      </a:r>
+                    </a:p>
+                  </a:txBody>
+                  <a:tcPr>
+                    <a:solidFill>
+                      <a:srgbClr val="FFFFFF"/>
+                    </a:solidFill>
+                  </a:tcPr>
+                </a:tc>
+                <a:tc>
+                  <a:txBody>
+                    <a:bodyPr/>
+                    <a:lstStyle/>
+                    <a:p>
+                      <a:pPr algn="l"/>
+                      <a:r>
+                        <a:rPr sz="1500">
+                          <a:solidFill>
+                            <a:srgbClr val="1F1F1F"/>
+                          </a:solidFill>
+                          <a:latin typeface="Calibri"/>
+                        </a:rPr>
+                        <a:t>0.5s</a:t>
+                      </a:r>
+                    </a:p>
+                  </a:txBody>
+                  <a:tcPr>
+                    <a:solidFill>
+                      <a:srgbClr val="FFFFFF"/>
+                    </a:solidFill>
+                  </a:tcPr>
+                </a:tc>
+                <a:tc>
+                  <a:txBody>
+                    <a:bodyPr/>
+                    <a:lstStyle/>
+                    <a:p>
+                      <a:pPr algn="l"/>
+                      <a:r>
+                        <a:rPr sz="1500">
+                          <a:solidFill>
+                            <a:srgbClr val="1F1F1F"/>
+                          </a:solidFill>
+                          <a:latin typeface="Calibri"/>
+                        </a:rPr>
+                        <a:t>Username 'admin' triggers permanent ban on request 1</a:t>
+                      </a:r>
+                    </a:p>
+                  </a:txBody>
+                  <a:tcPr>
+                    <a:solidFill>
+                      <a:srgbClr val="FFFFFF"/>
+                    </a:solidFill>
+                  </a:tcPr>
+                </a:tc>
+              </a:tr>
+              <a:tr h="457200">
+                <a:tc>
+                  <a:txBody>
+                    <a:bodyPr/>
+                    <a:lstStyle/>
+                    <a:p>
+                      <a:pPr algn="l"/>
+                      <a:r>
+                        <a:rPr sz="1500">
+                          <a:solidFill>
+                            <a:srgbClr val="1A3B5C"/>
+                          </a:solidFill>
+                          <a:latin typeface="Calibri"/>
+                        </a:rPr>
+                        <a:t>M_anomaly_no_ua</a:t>
+                      </a:r>
+                    </a:p>
+                  </a:txBody>
+                  <a:tcPr>
+                    <a:solidFill>
+                      <a:srgbClr val="F0F4F8"/>
+                    </a:solidFill>
+                  </a:tcPr>
+                </a:tc>
+                <a:tc>
+                  <a:txBody>
+                    <a:bodyPr/>
+                    <a:lstStyle/>
+                    <a:p>
+                      <a:pPr algn="l"/>
+                      <a:r>
+                        <a:rPr sz="1500">
+                          <a:solidFill>
+                            <a:srgbClr val="1F1F1F"/>
+                          </a:solidFill>
+                          <a:latin typeface="Calibri"/>
+                        </a:rPr>
+                        <a:t>0.5s</a:t>
+                      </a:r>
+                    </a:p>
+                  </a:txBody>
+                  <a:tcPr>
+                    <a:solidFill>
+                      <a:srgbClr val="F0F4F8"/>
+                    </a:solidFill>
+                  </a:tcPr>
+                </a:tc>
+                <a:tc>
+                  <a:txBody>
+                    <a:bodyPr/>
+                    <a:lstStyle/>
+                    <a:p>
+                      <a:pPr algn="l"/>
+                      <a:r>
+                        <a:rPr sz="1500">
+                          <a:solidFill>
+                            <a:srgbClr val="1F1F1F"/>
+                          </a:solidFill>
+                          <a:latin typeface="Calibri"/>
+                        </a:rPr>
+                        <a:t>Missing User-Agent flagged on request 1</a:t>
+                      </a:r>
+                    </a:p>
+                  </a:txBody>
+                  <a:tcPr>
+                    <a:solidFill>
+                      <a:srgbClr val="F0F4F8"/>
+                    </a:solidFill>
+                  </a:tcPr>
+                </a:tc>
+              </a:tr>
+              <a:tr h="457200">
+                <a:tc>
+                  <a:txBody>
+                    <a:bodyPr/>
+                    <a:lstStyle/>
+                    <a:p>
+                      <a:pPr algn="l"/>
+                      <a:r>
+                        <a:rPr sz="1500">
+                          <a:solidFill>
+                            <a:srgbClr val="1A3B5C"/>
+                          </a:solidFill>
+                          <a:latin typeface="Calibri"/>
+                        </a:rPr>
+                        <a:t>E_ip_exp_backoff</a:t>
+                      </a:r>
+                    </a:p>
+                  </a:txBody>
+                  <a:tcPr>
+                    <a:solidFill>
+                      <a:srgbClr val="FFFFFF"/>
+                    </a:solidFill>
+                  </a:tcPr>
+                </a:tc>
+                <a:tc>
+                  <a:txBody>
+                    <a:bodyPr/>
+                    <a:lstStyle/>
+                    <a:p>
+                      <a:pPr algn="l"/>
+                      <a:r>
+                        <a:rPr sz="1500">
+                          <a:solidFill>
+                            <a:srgbClr val="1F1F1F"/>
+                          </a:solidFill>
+                          <a:latin typeface="Calibri"/>
+                        </a:rPr>
+                        <a:t>0.7s</a:t>
+                      </a:r>
+                    </a:p>
+                  </a:txBody>
+                  <a:tcPr>
+                    <a:solidFill>
+                      <a:srgbClr val="FFFFFF"/>
+                    </a:solidFill>
+                  </a:tcPr>
+                </a:tc>
+                <a:tc>
+                  <a:txBody>
+                    <a:bodyPr/>
+                    <a:lstStyle/>
+                    <a:p>
+                      <a:pPr algn="l"/>
+                      <a:r>
+                        <a:rPr sz="1500">
+                          <a:solidFill>
+                            <a:srgbClr val="1F1F1F"/>
+                          </a:solidFill>
+                          <a:latin typeface="Calibri"/>
+                        </a:rPr>
+                        <a:t>Per-IP backoff hits cap before any breach window opens</a:t>
+                      </a:r>
+                    </a:p>
+                  </a:txBody>
+                  <a:tcPr>
+                    <a:solidFill>
+                      <a:srgbClr val="FFFFFF"/>
+                    </a:solidFill>
+                  </a:tcPr>
+                </a:tc>
+              </a:tr>
+            </a:tbl>
+          </a:graphicData>
+        </a:graphic>
+      </p:graphicFrame>
+      <p:sp>
+        <p:nvSpPr>
+          <p:cNvPr id="6" name="Rectangle 5"/>
+          <p:cNvSpPr/>
+          <p:nvPr/>
+        </p:nvSpPr>
+        <p:spPr>
+          <a:xfrm>
+            <a:off x="548640" y="4023360"/>
+            <a:ext cx="11094415" cy="54864"/>
+          </a:xfrm>
+          <a:prstGeom prst="rect">
+            <a:avLst/>
+          </a:prstGeom>
+          <a:solidFill>
+            <a:srgbClr val="2D8F5A"/>
+          </a:solidFill>
+          <a:ln>
+            <a:noFill/>
+          </a:ln>
+        </p:spPr>
+        <p:style>
+          <a:lnRef idx="1">
+            <a:schemeClr val="accent1"/>
+          </a:lnRef>
+          <a:fillRef idx="3">
+            <a:schemeClr val="accent1"/>
+          </a:fillRef>
+          <a:effectRef idx="2">
+            <a:schemeClr val="accent1"/>
+          </a:effectRef>
+          <a:fontRef idx="minor">
+            <a:schemeClr val="lt1"/>
+          </a:fontRef>
+        </p:style>
+        <p:txBody>
+          <a:bodyPr rtlCol="0" anchor="ctr"/>
+          <a:lstStyle/>
+          <a:p>
+            <a:pPr algn="ctr"/>
+          </a:p>
+        </p:txBody>
+      </p:sp>
+      <p:sp>
+        <p:nvSpPr>
+          <p:cNvPr id="7" name="TextBox 6"/>
+          <p:cNvSpPr txBox="1"/>
+          <p:nvPr/>
+        </p:nvSpPr>
+        <p:spPr>
+          <a:xfrm>
+            <a:off x="548640" y="4206240"/>
+            <a:ext cx="11094415" cy="2103120"/>
+          </a:xfrm>
+          <a:prstGeom prst="rect">
+            <a:avLst/>
+          </a:prstGeom>
+          <a:noFill/>
+        </p:spPr>
+        <p:txBody>
+          <a:bodyPr wrap="square" lIns="0" rIns="0">
+            <a:spAutoFit/>
+          </a:bodyPr>
+          <a:lstStyle/>
+          <a:p>
+            <a:pPr algn="l">
+              <a:lnSpc>
+                <a:spcPct val="115000"/>
+              </a:lnSpc>
+            </a:pPr>
+            <a:r>
+              <a:rPr sz="1500" b="1">
+                <a:solidFill>
+                  <a:srgbClr val="2D8F5A"/>
+                </a:solidFill>
+                <a:latin typeface="Calibri"/>
+              </a:rPr>
+              <a:t>• </a:t>
+            </a:r>
+            <a:r>
+              <a:rPr sz="1500">
+                <a:solidFill>
+                  <a:srgbClr val="1F1F1F"/>
+                </a:solidFill>
+                <a:latin typeface="Calibri"/>
+              </a:rPr>
+              <a:t>These are the only configs that block before the password could possibly be tried.</a:t>
+            </a:r>
+          </a:p>
+          <a:p>
+            <a:pPr algn="l">
+              <a:lnSpc>
+                <a:spcPct val="115000"/>
+              </a:lnSpc>
+            </a:pPr>
+            <a:r>
+              <a:rPr sz="1500" b="1">
+                <a:solidFill>
+                  <a:srgbClr val="2D8F5A"/>
+                </a:solidFill>
+                <a:latin typeface="Calibri"/>
+              </a:rPr>
+              <a:t>• </a:t>
+            </a:r>
+            <a:r>
+              <a:rPr sz="1500">
+                <a:solidFill>
+                  <a:srgbClr val="1F1F1F"/>
+                </a:solidFill>
+                <a:latin typeface="Calibri"/>
+              </a:rPr>
+              <a:t>Honeypot and anomaly only work because the attacker is naive (admin user / missing UA).</a:t>
+            </a:r>
+          </a:p>
+          <a:p>
+            <a:pPr algn="l">
+              <a:lnSpc>
+                <a:spcPct val="115000"/>
+              </a:lnSpc>
+            </a:pPr>
+            <a:r>
+              <a:rPr sz="1500" b="1">
+                <a:solidFill>
+                  <a:srgbClr val="2D8F5A"/>
+                </a:solidFill>
+                <a:latin typeface="Calibri"/>
+              </a:rPr>
+              <a:t>• </a:t>
+            </a:r>
+            <a:r>
+              <a:rPr sz="1500">
+                <a:solidFill>
+                  <a:srgbClr val="1F1F1F"/>
+                </a:solidFill>
+                <a:latin typeface="Calibri"/>
+              </a:rPr>
+              <a:t>A header-aware attacker bypasses both - see M2_anomaly_normal_ua at 100% breach.</a:t>
+            </a:r>
+          </a:p>
+        </p:txBody>
+      </p:sp>
+    </p:spTree>
+  </p:cSld>
+  <p:clrMapOvr>
+    <a:masterClrMapping/>
+  </p:clrMapOvr>
+</p:sld>
+</file>
+
+<file path=ppt/slides/slide14.xml><?xml version="1.0" encoding="utf-8"?>
+<p:sld xmlns:a="http://schemas.openxmlformats.org/drawingml/2006/main" xmlns:p="http://schemas.openxmlformats.org/presentationml/2006/main" xmlns:r="http://schemas.openxmlformats.org/officeDocument/2006/relationships">
+  <p:cSld>
+    <p:spTree>
+      <p:nvGrpSpPr>
+        <p:cNvPr id="1" name=""/>
+        <p:cNvGrpSpPr/>
+        <p:nvPr/>
+      </p:nvGrpSpPr>
+      <p:grpSpPr/>
+      <p:sp>
+        <p:nvSpPr>
+          <p:cNvPr id="2" name="Rectangle 1"/>
+          <p:cNvSpPr/>
+          <p:nvPr/>
+        </p:nvSpPr>
+        <p:spPr>
+          <a:xfrm>
+            <a:off x="0" y="0"/>
+            <a:ext cx="12191695" cy="91440"/>
+          </a:xfrm>
+          <a:prstGeom prst="rect">
+            <a:avLst/>
+          </a:prstGeom>
+          <a:solidFill>
+            <a:srgbClr val="1A3B5C"/>
+          </a:solidFill>
+          <a:ln>
+            <a:noFill/>
+          </a:ln>
+        </p:spPr>
+        <p:style>
+          <a:lnRef idx="1">
+            <a:schemeClr val="accent1"/>
+          </a:lnRef>
+          <a:fillRef idx="3">
+            <a:schemeClr val="accent1"/>
+          </a:fillRef>
+          <a:effectRef idx="2">
+            <a:schemeClr val="accent1"/>
+          </a:effectRef>
+          <a:fontRef idx="minor">
+            <a:schemeClr val="lt1"/>
+          </a:fontRef>
+        </p:style>
+        <p:txBody>
+          <a:bodyPr rtlCol="0" anchor="ctr"/>
+          <a:lstStyle/>
+          <a:p>
+            <a:pPr algn="ctr"/>
+          </a:p>
+        </p:txBody>
+      </p:sp>
+      <p:sp>
+        <p:nvSpPr>
+          <p:cNvPr id="3" name="TextBox 2"/>
+          <p:cNvSpPr txBox="1"/>
+          <p:nvPr/>
+        </p:nvSpPr>
+        <p:spPr>
+          <a:xfrm>
+            <a:off x="457200" y="228600"/>
+            <a:ext cx="11277295" cy="640080"/>
+          </a:xfrm>
+          <a:prstGeom prst="rect">
+            <a:avLst/>
+          </a:prstGeom>
+          <a:noFill/>
+        </p:spPr>
+        <p:txBody>
+          <a:bodyPr wrap="square" anchor="t" lIns="0" rIns="0" tIns="0" bIns="0">
+            <a:spAutoFit/>
+          </a:bodyPr>
+          <a:lstStyle/>
+          <a:p>
+            <a:pPr algn="l"/>
+            <a:r>
+              <a:rPr sz="3000" b="1">
+                <a:solidFill>
+                  <a:srgbClr val="1A3B5C"/>
+                </a:solidFill>
+                <a:latin typeface="Calibri"/>
+              </a:rPr>
+              <a:t>Lottery window (2-4% breach in 50 trials)</a:t>
+            </a:r>
+          </a:p>
+        </p:txBody>
+      </p:sp>
+      <p:sp>
+        <p:nvSpPr>
+          <p:cNvPr id="4" name="TextBox 3"/>
+          <p:cNvSpPr txBox="1"/>
+          <p:nvPr/>
+        </p:nvSpPr>
+        <p:spPr>
+          <a:xfrm>
+            <a:off x="457200" y="868680"/>
+            <a:ext cx="11277295" cy="365760"/>
+          </a:xfrm>
+          <a:prstGeom prst="rect">
+            <a:avLst/>
+          </a:prstGeom>
+          <a:noFill/>
+        </p:spPr>
+        <p:txBody>
+          <a:bodyPr wrap="square" anchor="t" lIns="0" rIns="0" tIns="0" bIns="0">
+            <a:spAutoFit/>
+          </a:bodyPr>
+          <a:lstStyle/>
+          <a:p>
+            <a:pPr algn="l"/>
+            <a:r>
+              <a:rPr sz="1600" b="0">
+                <a:solidFill>
+                  <a:srgbClr val="6A6A6A"/>
+                </a:solidFill>
+                <a:latin typeface="Calibri"/>
+              </a:rPr>
+              <a:t>Defenses gated on N=5 failures: breach when password lands in attempts 1-5</a:t>
+            </a:r>
+          </a:p>
+        </p:txBody>
+      </p:sp>
+      <p:graphicFrame>
+        <p:nvGraphicFramePr>
+          <p:cNvPr id="5" name="Table 4"/>
+          <p:cNvGraphicFramePr>
+            <a:graphicFrameLocks noGrp="1"/>
+          </p:cNvGraphicFramePr>
+          <p:nvPr/>
+        </p:nvGraphicFramePr>
+        <p:xfrm>
+          <a:off x="365760" y="1554480"/>
+          <a:ext cx="11460175" cy="3108960"/>
+        </p:xfrm>
+        <a:graphic>
+          <a:graphicData uri="http://schemas.openxmlformats.org/drawingml/2006/table">
+            <a:tbl>
+              <a:tblPr firstRow="1" bandRow="1">
+                <a:tableStyleId>{5C22544A-7EE6-4342-B048-85BDC9FD1C3A}</a:tableStyleId>
+              </a:tblPr>
+              <a:tblGrid>
+                <a:gridCol w="2865043"/>
+                <a:gridCol w="2865043"/>
+                <a:gridCol w="2865043"/>
+                <a:gridCol w="2865046"/>
+              </a:tblGrid>
+              <a:tr h="388620">
+                <a:tc>
+                  <a:txBody>
+                    <a:bodyPr/>
+                    <a:lstStyle/>
+                    <a:p>
+                      <a:pPr algn="l"/>
+                      <a:r>
+                        <a:rPr sz="1300" b="1">
+                          <a:solidFill>
+                            <a:srgbClr val="FFFFFF"/>
+                          </a:solidFill>
+                          <a:latin typeface="Calibri"/>
+                        </a:rPr>
+                        <a:t>Config</a:t>
+                      </a:r>
+                    </a:p>
+                  </a:txBody>
+                  <a:tcPr>
+                    <a:solidFill>
+                      <a:srgbClr val="1A3B5C"/>
+                    </a:solidFill>
+                  </a:tcPr>
+                </a:tc>
+                <a:tc>
+                  <a:txBody>
+                    <a:bodyPr/>
+                    <a:lstStyle/>
+                    <a:p>
+                      <a:pPr algn="l"/>
+                      <a:r>
+                        <a:rPr sz="1300" b="1">
+                          <a:solidFill>
+                            <a:srgbClr val="FFFFFF"/>
+                          </a:solidFill>
+                          <a:latin typeface="Calibri"/>
+                        </a:rPr>
+                        <a:t>Breach</a:t>
+                      </a:r>
+                    </a:p>
+                  </a:txBody>
+                  <a:tcPr>
+                    <a:solidFill>
+                      <a:srgbClr val="1A3B5C"/>
+                    </a:solidFill>
+                  </a:tcPr>
+                </a:tc>
+                <a:tc>
+                  <a:txBody>
+                    <a:bodyPr/>
+                    <a:lstStyle/>
+                    <a:p>
+                      <a:pPr algn="l"/>
+                      <a:r>
+                        <a:rPr sz="1300" b="1">
+                          <a:solidFill>
+                            <a:srgbClr val="FFFFFF"/>
+                          </a:solidFill>
+                          <a:latin typeface="Calibri"/>
+                        </a:rPr>
+                        <a:t>Median elapsed</a:t>
+                      </a:r>
+                    </a:p>
+                  </a:txBody>
+                  <a:tcPr>
+                    <a:solidFill>
+                      <a:srgbClr val="1A3B5C"/>
+                    </a:solidFill>
+                  </a:tcPr>
+                </a:tc>
+                <a:tc>
+                  <a:txBody>
+                    <a:bodyPr/>
+                    <a:lstStyle/>
+                    <a:p>
+                      <a:pPr algn="l"/>
+                      <a:r>
+                        <a:rPr sz="1300" b="1">
+                          <a:solidFill>
+                            <a:srgbClr val="FFFFFF"/>
+                          </a:solidFill>
+                          <a:latin typeface="Calibri"/>
+                        </a:rPr>
+                        <a:t>Defense threshold</a:t>
+                      </a:r>
+                    </a:p>
+                  </a:txBody>
+                  <a:tcPr>
+                    <a:solidFill>
+                      <a:srgbClr val="1A3B5C"/>
+                    </a:solidFill>
+                  </a:tcPr>
+                </a:tc>
+              </a:tr>
+              <a:tr h="388620">
+                <a:tc>
+                  <a:txBody>
+                    <a:bodyPr/>
+                    <a:lstStyle/>
+                    <a:p>
+                      <a:pPr algn="l"/>
+                      <a:r>
+                        <a:rPr sz="1300">
+                          <a:solidFill>
+                            <a:srgbClr val="1A3B5C"/>
+                          </a:solidFill>
+                          <a:latin typeface="Calibri"/>
+                        </a:rPr>
+                        <a:t>B_account_lockout</a:t>
+                      </a:r>
+                    </a:p>
+                  </a:txBody>
+                  <a:tcPr>
+                    <a:solidFill>
+                      <a:srgbClr val="FFFFFF"/>
+                    </a:solidFill>
+                  </a:tcPr>
+                </a:tc>
+                <a:tc>
+                  <a:txBody>
+                    <a:bodyPr/>
+                    <a:lstStyle/>
+                    <a:p>
+                      <a:pPr algn="l"/>
+                      <a:r>
+                        <a:rPr sz="1300">
+                          <a:solidFill>
+                            <a:srgbClr val="C87A00"/>
+                          </a:solidFill>
+                          <a:latin typeface="Calibri"/>
+                        </a:rPr>
+                        <a:t>2%</a:t>
+                      </a:r>
+                    </a:p>
+                  </a:txBody>
+                  <a:tcPr>
+                    <a:solidFill>
+                      <a:srgbClr val="FFFFFF"/>
+                    </a:solidFill>
+                  </a:tcPr>
+                </a:tc>
+                <a:tc>
+                  <a:txBody>
+                    <a:bodyPr/>
+                    <a:lstStyle/>
+                    <a:p>
+                      <a:pPr algn="l"/>
+                      <a:r>
+                        <a:rPr sz="1300">
+                          <a:solidFill>
+                            <a:srgbClr val="1F1F1F"/>
+                          </a:solidFill>
+                          <a:latin typeface="Calibri"/>
+                        </a:rPr>
+                        <a:t>1.3s</a:t>
+                      </a:r>
+                    </a:p>
+                  </a:txBody>
+                  <a:tcPr>
+                    <a:solidFill>
+                      <a:srgbClr val="FFFFFF"/>
+                    </a:solidFill>
+                  </a:tcPr>
+                </a:tc>
+                <a:tc>
+                  <a:txBody>
+                    <a:bodyPr/>
+                    <a:lstStyle/>
+                    <a:p>
+                      <a:pPr algn="l"/>
+                      <a:r>
+                        <a:rPr sz="1300">
+                          <a:solidFill>
+                            <a:srgbClr val="1F1F1F"/>
+                          </a:solidFill>
+                          <a:latin typeface="Calibri"/>
+                        </a:rPr>
+                        <a:t>5 fails -&gt; 60s lock</a:t>
+                      </a:r>
+                    </a:p>
+                  </a:txBody>
+                  <a:tcPr>
+                    <a:solidFill>
+                      <a:srgbClr val="FFFFFF"/>
+                    </a:solidFill>
+                  </a:tcPr>
+                </a:tc>
+              </a:tr>
+              <a:tr h="388620">
+                <a:tc>
+                  <a:txBody>
+                    <a:bodyPr/>
+                    <a:lstStyle/>
+                    <a:p>
+                      <a:pPr algn="l"/>
+                      <a:r>
+                        <a:rPr sz="1300">
+                          <a:solidFill>
+                            <a:srgbClr val="1A3B5C"/>
+                          </a:solidFill>
+                          <a:latin typeface="Calibri"/>
+                        </a:rPr>
+                        <a:t>G_pow_naive_attacker</a:t>
+                      </a:r>
+                    </a:p>
+                  </a:txBody>
+                  <a:tcPr>
+                    <a:solidFill>
+                      <a:srgbClr val="F0F4F8"/>
+                    </a:solidFill>
+                  </a:tcPr>
+                </a:tc>
+                <a:tc>
+                  <a:txBody>
+                    <a:bodyPr/>
+                    <a:lstStyle/>
+                    <a:p>
+                      <a:pPr algn="l"/>
+                      <a:r>
+                        <a:rPr sz="1300">
+                          <a:solidFill>
+                            <a:srgbClr val="C87A00"/>
+                          </a:solidFill>
+                          <a:latin typeface="Calibri"/>
+                        </a:rPr>
+                        <a:t>2%</a:t>
+                      </a:r>
+                    </a:p>
+                  </a:txBody>
+                  <a:tcPr>
+                    <a:solidFill>
+                      <a:srgbClr val="F0F4F8"/>
+                    </a:solidFill>
+                  </a:tcPr>
+                </a:tc>
+                <a:tc>
+                  <a:txBody>
+                    <a:bodyPr/>
+                    <a:lstStyle/>
+                    <a:p>
+                      <a:pPr algn="l"/>
+                      <a:r>
+                        <a:rPr sz="1300">
+                          <a:solidFill>
+                            <a:srgbClr val="1F1F1F"/>
+                          </a:solidFill>
+                          <a:latin typeface="Calibri"/>
+                        </a:rPr>
+                        <a:t>1.3s</a:t>
+                      </a:r>
+                    </a:p>
+                  </a:txBody>
+                  <a:tcPr>
+                    <a:solidFill>
+                      <a:srgbClr val="F0F4F8"/>
+                    </a:solidFill>
+                  </a:tcPr>
+                </a:tc>
+                <a:tc>
+                  <a:txBody>
+                    <a:bodyPr/>
+                    <a:lstStyle/>
+                    <a:p>
+                      <a:pPr algn="l"/>
+                      <a:r>
+                        <a:rPr sz="1300">
+                          <a:solidFill>
+                            <a:srgbClr val="1F1F1F"/>
+                          </a:solidFill>
+                          <a:latin typeface="Calibri"/>
+                        </a:rPr>
+                        <a:t>5 fails -&gt; PoW (no solver)</a:t>
+                      </a:r>
+                    </a:p>
+                  </a:txBody>
+                  <a:tcPr>
+                    <a:solidFill>
+                      <a:srgbClr val="F0F4F8"/>
+                    </a:solidFill>
+                  </a:tcPr>
+                </a:tc>
+              </a:tr>
+              <a:tr h="388620">
+                <a:tc>
+                  <a:txBody>
+                    <a:bodyPr/>
+                    <a:lstStyle/>
+                    <a:p>
+                      <a:pPr algn="l"/>
+                      <a:r>
+                        <a:rPr sz="1300">
+                          <a:solidFill>
+                            <a:srgbClr val="1A3B5C"/>
+                          </a:solidFill>
+                          <a:latin typeface="Calibri"/>
+                        </a:rPr>
+                        <a:t>J_captcha_naive</a:t>
+                      </a:r>
+                    </a:p>
+                  </a:txBody>
+                  <a:tcPr>
+                    <a:solidFill>
+                      <a:srgbClr val="FFFFFF"/>
+                    </a:solidFill>
+                  </a:tcPr>
+                </a:tc>
+                <a:tc>
+                  <a:txBody>
+                    <a:bodyPr/>
+                    <a:lstStyle/>
+                    <a:p>
+                      <a:pPr algn="l"/>
+                      <a:r>
+                        <a:rPr sz="1300">
+                          <a:solidFill>
+                            <a:srgbClr val="C87A00"/>
+                          </a:solidFill>
+                          <a:latin typeface="Calibri"/>
+                        </a:rPr>
+                        <a:t>2%</a:t>
+                      </a:r>
+                    </a:p>
+                  </a:txBody>
+                  <a:tcPr>
+                    <a:solidFill>
+                      <a:srgbClr val="FFFFFF"/>
+                    </a:solidFill>
+                  </a:tcPr>
+                </a:tc>
+                <a:tc>
+                  <a:txBody>
+                    <a:bodyPr/>
+                    <a:lstStyle/>
+                    <a:p>
+                      <a:pPr algn="l"/>
+                      <a:r>
+                        <a:rPr sz="1300">
+                          <a:solidFill>
+                            <a:srgbClr val="1F1F1F"/>
+                          </a:solidFill>
+                          <a:latin typeface="Calibri"/>
+                        </a:rPr>
+                        <a:t>1.3s</a:t>
+                      </a:r>
+                    </a:p>
+                  </a:txBody>
+                  <a:tcPr>
+                    <a:solidFill>
+                      <a:srgbClr val="FFFFFF"/>
+                    </a:solidFill>
+                  </a:tcPr>
+                </a:tc>
+                <a:tc>
+                  <a:txBody>
+                    <a:bodyPr/>
+                    <a:lstStyle/>
+                    <a:p>
+                      <a:pPr algn="l"/>
+                      <a:r>
+                        <a:rPr sz="1300">
+                          <a:solidFill>
+                            <a:srgbClr val="1F1F1F"/>
+                          </a:solidFill>
+                          <a:latin typeface="Calibri"/>
+                        </a:rPr>
+                        <a:t>5 fails -&gt; CAPTCHA (no solver)</a:t>
+                      </a:r>
+                    </a:p>
+                  </a:txBody>
+                  <a:tcPr>
+                    <a:solidFill>
+                      <a:srgbClr val="FFFFFF"/>
+                    </a:solidFill>
+                  </a:tcPr>
+                </a:tc>
+              </a:tr>
+              <a:tr h="388620">
+                <a:tc>
+                  <a:txBody>
+                    <a:bodyPr/>
+                    <a:lstStyle/>
+                    <a:p>
+                      <a:pPr algn="l"/>
+                      <a:r>
+                        <a:rPr sz="1300">
+                          <a:solidFill>
+                            <a:srgbClr val="1A3B5C"/>
+                          </a:solidFill>
+                          <a:latin typeface="Calibri"/>
+                        </a:rPr>
+                        <a:t>I_perma_ban</a:t>
+                      </a:r>
+                    </a:p>
+                  </a:txBody>
+                  <a:tcPr>
+                    <a:solidFill>
+                      <a:srgbClr val="F0F4F8"/>
+                    </a:solidFill>
+                  </a:tcPr>
+                </a:tc>
+                <a:tc>
+                  <a:txBody>
+                    <a:bodyPr/>
+                    <a:lstStyle/>
+                    <a:p>
+                      <a:pPr algn="l"/>
+                      <a:r>
+                        <a:rPr sz="1300">
+                          <a:solidFill>
+                            <a:srgbClr val="C87A00"/>
+                          </a:solidFill>
+                          <a:latin typeface="Calibri"/>
+                        </a:rPr>
+                        <a:t>2%</a:t>
+                      </a:r>
+                    </a:p>
+                  </a:txBody>
+                  <a:tcPr>
+                    <a:solidFill>
+                      <a:srgbClr val="F0F4F8"/>
+                    </a:solidFill>
+                  </a:tcPr>
+                </a:tc>
+                <a:tc>
+                  <a:txBody>
+                    <a:bodyPr/>
+                    <a:lstStyle/>
+                    <a:p>
+                      <a:pPr algn="l"/>
+                      <a:r>
+                        <a:rPr sz="1300">
+                          <a:solidFill>
+                            <a:srgbClr val="1F1F1F"/>
+                          </a:solidFill>
+                          <a:latin typeface="Calibri"/>
+                        </a:rPr>
+                        <a:t>1.8s</a:t>
+                      </a:r>
+                    </a:p>
+                  </a:txBody>
+                  <a:tcPr>
+                    <a:solidFill>
+                      <a:srgbClr val="F0F4F8"/>
+                    </a:solidFill>
+                  </a:tcPr>
+                </a:tc>
+                <a:tc>
+                  <a:txBody>
+                    <a:bodyPr/>
+                    <a:lstStyle/>
+                    <a:p>
+                      <a:pPr algn="l"/>
+                      <a:r>
+                        <a:rPr sz="1300">
+                          <a:solidFill>
+                            <a:srgbClr val="1F1F1F"/>
+                          </a:solidFill>
+                          <a:latin typeface="Calibri"/>
+                        </a:rPr>
+                        <a:t>8 fails -&gt; permanent ban</a:t>
+                      </a:r>
+                    </a:p>
+                  </a:txBody>
+                  <a:tcPr>
+                    <a:solidFill>
+                      <a:srgbClr val="F0F4F8"/>
+                    </a:solidFill>
+                  </a:tcPr>
+                </a:tc>
+              </a:tr>
+              <a:tr h="388620">
+                <a:tc>
+                  <a:txBody>
+                    <a:bodyPr/>
+                    <a:lstStyle/>
+                    <a:p>
+                      <a:pPr algn="l"/>
+                      <a:r>
+                        <a:rPr sz="1300">
+                          <a:solidFill>
+                            <a:srgbClr val="1A3B5C"/>
+                          </a:solidFill>
+                          <a:latin typeface="Calibri"/>
+                        </a:rPr>
+                        <a:t>C_ip_rate_limit</a:t>
+                      </a:r>
+                    </a:p>
+                  </a:txBody>
+                  <a:tcPr>
+                    <a:solidFill>
+                      <a:srgbClr val="FFFFFF"/>
+                    </a:solidFill>
+                  </a:tcPr>
+                </a:tc>
+                <a:tc>
+                  <a:txBody>
+                    <a:bodyPr/>
+                    <a:lstStyle/>
+                    <a:p>
+                      <a:pPr algn="l"/>
+                      <a:r>
+                        <a:rPr sz="1300">
+                          <a:solidFill>
+                            <a:srgbClr val="C87A00"/>
+                          </a:solidFill>
+                          <a:latin typeface="Calibri"/>
+                        </a:rPr>
+                        <a:t>4%</a:t>
+                      </a:r>
+                    </a:p>
+                  </a:txBody>
+                  <a:tcPr>
+                    <a:solidFill>
+                      <a:srgbClr val="FFFFFF"/>
+                    </a:solidFill>
+                  </a:tcPr>
+                </a:tc>
+                <a:tc>
+                  <a:txBody>
+                    <a:bodyPr/>
+                    <a:lstStyle/>
+                    <a:p>
+                      <a:pPr algn="l"/>
+                      <a:r>
+                        <a:rPr sz="1300">
+                          <a:solidFill>
+                            <a:srgbClr val="1F1F1F"/>
+                          </a:solidFill>
+                          <a:latin typeface="Calibri"/>
+                        </a:rPr>
+                        <a:t>2.1s</a:t>
+                      </a:r>
+                    </a:p>
+                  </a:txBody>
+                  <a:tcPr>
+                    <a:solidFill>
+                      <a:srgbClr val="FFFFFF"/>
+                    </a:solidFill>
+                  </a:tcPr>
+                </a:tc>
+                <a:tc>
+                  <a:txBody>
+                    <a:bodyPr/>
+                    <a:lstStyle/>
+                    <a:p>
+                      <a:pPr algn="l"/>
+                      <a:r>
+                        <a:rPr sz="1300">
+                          <a:solidFill>
+                            <a:srgbClr val="1F1F1F"/>
+                          </a:solidFill>
+                          <a:latin typeface="Calibri"/>
+                        </a:rPr>
+                        <a:t>10 attempts / 30s window</a:t>
+                      </a:r>
+                    </a:p>
+                  </a:txBody>
+                  <a:tcPr>
+                    <a:solidFill>
+                      <a:srgbClr val="FFFFFF"/>
+                    </a:solidFill>
+                  </a:tcPr>
+                </a:tc>
+              </a:tr>
+              <a:tr h="388620">
+                <a:tc>
+                  <a:txBody>
+                    <a:bodyPr/>
+                    <a:lstStyle/>
+                    <a:p>
+                      <a:pPr algn="l"/>
+                      <a:r>
+                        <a:rPr sz="1300">
+                          <a:solidFill>
+                            <a:srgbClr val="1A3B5C"/>
+                          </a:solidFill>
+                          <a:latin typeface="Calibri"/>
+                        </a:rPr>
+                        <a:t>H_layered_basic</a:t>
+                      </a:r>
+                    </a:p>
+                  </a:txBody>
+                  <a:tcPr>
+                    <a:solidFill>
+                      <a:srgbClr val="F0F4F8"/>
+                    </a:solidFill>
+                  </a:tcPr>
+                </a:tc>
+                <a:tc>
+                  <a:txBody>
+                    <a:bodyPr/>
+                    <a:lstStyle/>
+                    <a:p>
+                      <a:pPr algn="l"/>
+                      <a:r>
+                        <a:rPr sz="1300">
+                          <a:solidFill>
+                            <a:srgbClr val="C87A00"/>
+                          </a:solidFill>
+                          <a:latin typeface="Calibri"/>
+                        </a:rPr>
+                        <a:t>2%</a:t>
+                      </a:r>
+                    </a:p>
+                  </a:txBody>
+                  <a:tcPr>
+                    <a:solidFill>
+                      <a:srgbClr val="F0F4F8"/>
+                    </a:solidFill>
+                  </a:tcPr>
+                </a:tc>
+                <a:tc>
+                  <a:txBody>
+                    <a:bodyPr/>
+                    <a:lstStyle/>
+                    <a:p>
+                      <a:pPr algn="l"/>
+                      <a:r>
+                        <a:rPr sz="1300">
+                          <a:solidFill>
+                            <a:srgbClr val="1F1F1F"/>
+                          </a:solidFill>
+                          <a:latin typeface="Calibri"/>
+                        </a:rPr>
+                        <a:t>26.8s</a:t>
+                      </a:r>
+                    </a:p>
+                  </a:txBody>
+                  <a:tcPr>
+                    <a:solidFill>
+                      <a:srgbClr val="F0F4F8"/>
+                    </a:solidFill>
+                  </a:tcPr>
+                </a:tc>
+                <a:tc>
+                  <a:txBody>
+                    <a:bodyPr/>
+                    <a:lstStyle/>
+                    <a:p>
+                      <a:pPr algn="l"/>
+                      <a:r>
+                        <a:rPr sz="1300">
+                          <a:solidFill>
+                            <a:srgbClr val="1F1F1F"/>
+                          </a:solidFill>
+                          <a:latin typeface="Calibri"/>
+                        </a:rPr>
+                        <a:t>lockout dominates the stack</a:t>
+                      </a:r>
+                    </a:p>
+                  </a:txBody>
+                  <a:tcPr>
+                    <a:solidFill>
+                      <a:srgbClr val="F0F4F8"/>
+                    </a:solidFill>
+                  </a:tcPr>
+                </a:tc>
+              </a:tr>
+              <a:tr h="388620">
+                <a:tc>
+                  <a:txBody>
+                    <a:bodyPr/>
+                    <a:lstStyle/>
+                    <a:p>
+                      <a:pPr algn="l"/>
+                      <a:r>
+                        <a:rPr sz="1300">
+                          <a:solidFill>
+                            <a:srgbClr val="1A3B5C"/>
+                          </a:solidFill>
+                          <a:latin typeface="Calibri"/>
+                        </a:rPr>
+                        <a:t>H3_full_stack</a:t>
+                      </a:r>
+                    </a:p>
+                  </a:txBody>
+                  <a:tcPr>
+                    <a:solidFill>
+                      <a:srgbClr val="FFFFFF"/>
+                    </a:solidFill>
+                  </a:tcPr>
+                </a:tc>
+                <a:tc>
+                  <a:txBody>
+                    <a:bodyPr/>
+                    <a:lstStyle/>
+                    <a:p>
+                      <a:pPr algn="l"/>
+                      <a:r>
+                        <a:rPr sz="1300">
+                          <a:solidFill>
+                            <a:srgbClr val="C87A00"/>
+                          </a:solidFill>
+                          <a:latin typeface="Calibri"/>
+                        </a:rPr>
+                        <a:t>4%</a:t>
+                      </a:r>
+                    </a:p>
+                  </a:txBody>
+                  <a:tcPr>
+                    <a:solidFill>
+                      <a:srgbClr val="FFFFFF"/>
+                    </a:solidFill>
+                  </a:tcPr>
+                </a:tc>
+                <a:tc>
+                  <a:txBody>
+                    <a:bodyPr/>
+                    <a:lstStyle/>
+                    <a:p>
+                      <a:pPr algn="l"/>
+                      <a:r>
+                        <a:rPr sz="1300">
+                          <a:solidFill>
+                            <a:srgbClr val="1F1F1F"/>
+                          </a:solidFill>
+                          <a:latin typeface="Calibri"/>
+                        </a:rPr>
+                        <a:t>30.1s</a:t>
+                      </a:r>
+                    </a:p>
+                  </a:txBody>
+                  <a:tcPr>
+                    <a:solidFill>
+                      <a:srgbClr val="FFFFFF"/>
+                    </a:solidFill>
+                  </a:tcPr>
+                </a:tc>
+                <a:tc>
+                  <a:txBody>
+                    <a:bodyPr/>
+                    <a:lstStyle/>
+                    <a:p>
+                      <a:pPr algn="l"/>
+                      <a:r>
+                        <a:rPr sz="1300">
+                          <a:solidFill>
+                            <a:srgbClr val="1F1F1F"/>
+                          </a:solidFill>
+                          <a:latin typeface="Calibri"/>
+                        </a:rPr>
+                        <a:t>every mechanism enabled</a:t>
+                      </a:r>
+                    </a:p>
+                  </a:txBody>
+                  <a:tcPr>
+                    <a:solidFill>
+                      <a:srgbClr val="FFFFFF"/>
+                    </a:solidFill>
+                  </a:tcPr>
+                </a:tc>
+              </a:tr>
+            </a:tbl>
+          </a:graphicData>
+        </a:graphic>
+      </p:graphicFrame>
+      <p:sp>
+        <p:nvSpPr>
+          <p:cNvPr id="6" name="Rectangle 5"/>
+          <p:cNvSpPr/>
+          <p:nvPr/>
+        </p:nvSpPr>
+        <p:spPr>
+          <a:xfrm>
+            <a:off x="548640" y="4937760"/>
+            <a:ext cx="11094415" cy="54864"/>
+          </a:xfrm>
+          <a:prstGeom prst="rect">
+            <a:avLst/>
+          </a:prstGeom>
+          <a:solidFill>
+            <a:srgbClr val="C87A00"/>
+          </a:solidFill>
+          <a:ln>
+            <a:noFill/>
+          </a:ln>
+        </p:spPr>
+        <p:style>
+          <a:lnRef idx="1">
+            <a:schemeClr val="accent1"/>
+          </a:lnRef>
+          <a:fillRef idx="3">
+            <a:schemeClr val="accent1"/>
+          </a:fillRef>
+          <a:effectRef idx="2">
+            <a:schemeClr val="accent1"/>
+          </a:effectRef>
+          <a:fontRef idx="minor">
+            <a:schemeClr val="lt1"/>
+          </a:fontRef>
+        </p:style>
+        <p:txBody>
+          <a:bodyPr rtlCol="0" anchor="ctr"/>
+          <a:lstStyle/>
+          <a:p>
+            <a:pPr algn="ctr"/>
+          </a:p>
+        </p:txBody>
+      </p:sp>
+      <p:sp>
+        <p:nvSpPr>
+          <p:cNvPr id="7" name="TextBox 6"/>
+          <p:cNvSpPr txBox="1"/>
+          <p:nvPr/>
+        </p:nvSpPr>
+        <p:spPr>
+          <a:xfrm>
+            <a:off x="548640" y="5120640"/>
+            <a:ext cx="11094415" cy="1645920"/>
+          </a:xfrm>
+          <a:prstGeom prst="rect">
+            <a:avLst/>
+          </a:prstGeom>
+          <a:noFill/>
+        </p:spPr>
+        <p:txBody>
+          <a:bodyPr wrap="square" lIns="0" rIns="0">
+            <a:spAutoFit/>
+          </a:bodyPr>
+          <a:lstStyle/>
+          <a:p>
+            <a:pPr algn="l">
+              <a:lnSpc>
+                <a:spcPct val="115000"/>
+              </a:lnSpc>
+            </a:pPr>
+            <a:r>
+              <a:rPr sz="1400" b="1">
+                <a:solidFill>
+                  <a:srgbClr val="C87A00"/>
+                </a:solidFill>
+                <a:latin typeface="Calibri"/>
+              </a:rPr>
+              <a:t>• </a:t>
+            </a:r>
+            <a:r>
+              <a:rPr sz="1400">
+                <a:solidFill>
+                  <a:srgbClr val="1F1F1F"/>
+                </a:solidFill>
+                <a:latin typeface="Calibri"/>
+              </a:rPr>
+              <a:t>P(breach) ~= 5/N where N is the wordlist size - the gating window is a structural blind spot.</a:t>
+            </a:r>
+          </a:p>
+          <a:p>
+            <a:pPr algn="l">
+              <a:lnSpc>
+                <a:spcPct val="115000"/>
+              </a:lnSpc>
+            </a:pPr>
+            <a:r>
+              <a:rPr sz="1400" b="1">
+                <a:solidFill>
+                  <a:srgbClr val="C87A00"/>
+                </a:solidFill>
+                <a:latin typeface="Calibri"/>
+              </a:rPr>
+              <a:t>• </a:t>
+            </a:r>
+            <a:r>
+              <a:rPr sz="1400">
+                <a:solidFill>
+                  <a:srgbClr val="1F1F1F"/>
+                </a:solidFill>
+                <a:latin typeface="Calibri"/>
+              </a:rPr>
+              <a:t>Median first-success position across all lottery breaches: 3.</a:t>
+            </a:r>
+          </a:p>
+          <a:p>
+            <a:pPr algn="l">
+              <a:lnSpc>
+                <a:spcPct val="115000"/>
+              </a:lnSpc>
+            </a:pPr>
+            <a:r>
+              <a:rPr sz="1400" b="1">
+                <a:solidFill>
+                  <a:srgbClr val="C87A00"/>
+                </a:solidFill>
+                <a:latin typeface="Calibri"/>
+              </a:rPr>
+              <a:t>• </a:t>
+            </a:r>
+            <a:r>
+              <a:rPr sz="1400">
+                <a:solidFill>
+                  <a:srgbClr val="1F1F1F"/>
+                </a:solidFill>
+                <a:latin typeface="Calibri"/>
+              </a:rPr>
+              <a:t>Pair with a defense that's active from request 1 (slow hash, honeypot) to cover the window.</a:t>
+            </a:r>
+          </a:p>
+        </p:txBody>
+      </p:sp>
+    </p:spTree>
+  </p:cSld>
+  <p:clrMapOvr>
+    <a:masterClrMapping/>
+  </p:clrMapOvr>
+</p:sld>
+</file>
+
+<file path=ppt/slides/slide15.xml><?xml version="1.0" encoding="utf-8"?>
+<p:sld xmlns:a="http://schemas.openxmlformats.org/drawingml/2006/main" xmlns:p="http://schemas.openxmlformats.org/presentationml/2006/main" xmlns:r="http://schemas.openxmlformats.org/officeDocument/2006/relationships">
+  <p:cSld>
+    <p:spTree>
+      <p:nvGrpSpPr>
+        <p:cNvPr id="1" name=""/>
+        <p:cNvGrpSpPr/>
+        <p:nvPr/>
+      </p:nvGrpSpPr>
+      <p:grpSpPr/>
+      <p:sp>
+        <p:nvSpPr>
+          <p:cNvPr id="2" name="Rectangle 1"/>
+          <p:cNvSpPr/>
+          <p:nvPr/>
+        </p:nvSpPr>
+        <p:spPr>
+          <a:xfrm>
+            <a:off x="0" y="0"/>
+            <a:ext cx="12191695" cy="91440"/>
+          </a:xfrm>
+          <a:prstGeom prst="rect">
+            <a:avLst/>
+          </a:prstGeom>
+          <a:solidFill>
+            <a:srgbClr val="1A3B5C"/>
+          </a:solidFill>
+          <a:ln>
+            <a:noFill/>
+          </a:ln>
+        </p:spPr>
+        <p:style>
+          <a:lnRef idx="1">
+            <a:schemeClr val="accent1"/>
+          </a:lnRef>
+          <a:fillRef idx="3">
+            <a:schemeClr val="accent1"/>
+          </a:fillRef>
+          <a:effectRef idx="2">
+            <a:schemeClr val="accent1"/>
+          </a:effectRef>
+          <a:fontRef idx="minor">
+            <a:schemeClr val="lt1"/>
+          </a:fontRef>
+        </p:style>
+        <p:txBody>
+          <a:bodyPr rtlCol="0" anchor="ctr"/>
+          <a:lstStyle/>
+          <a:p>
+            <a:pPr algn="ctr"/>
+          </a:p>
+        </p:txBody>
+      </p:sp>
+      <p:sp>
+        <p:nvSpPr>
+          <p:cNvPr id="3" name="TextBox 2"/>
+          <p:cNvSpPr txBox="1"/>
+          <p:nvPr/>
+        </p:nvSpPr>
+        <p:spPr>
+          <a:xfrm>
+            <a:off x="457200" y="228600"/>
+            <a:ext cx="11277295" cy="640080"/>
+          </a:xfrm>
+          <a:prstGeom prst="rect">
+            <a:avLst/>
+          </a:prstGeom>
+          <a:noFill/>
+        </p:spPr>
+        <p:txBody>
+          <a:bodyPr wrap="square" anchor="t" lIns="0" rIns="0" tIns="0" bIns="0">
+            <a:spAutoFit/>
+          </a:bodyPr>
+          <a:lstStyle/>
+          <a:p>
+            <a:pPr algn="l"/>
+            <a:r>
+              <a:rPr sz="3000" b="1">
+                <a:solidFill>
+                  <a:srgbClr val="1A3B5C"/>
+                </a:solidFill>
+                <a:latin typeface="Calibri"/>
+              </a:rPr>
+              <a:t>Slow-down only (100% breach in 50 trials)</a:t>
+            </a:r>
+          </a:p>
+        </p:txBody>
+      </p:sp>
+      <p:sp>
+        <p:nvSpPr>
+          <p:cNvPr id="4" name="TextBox 3"/>
+          <p:cNvSpPr txBox="1"/>
+          <p:nvPr/>
+        </p:nvSpPr>
+        <p:spPr>
+          <a:xfrm>
+            <a:off x="457200" y="868680"/>
+            <a:ext cx="11277295" cy="365760"/>
+          </a:xfrm>
+          <a:prstGeom prst="rect">
+            <a:avLst/>
+          </a:prstGeom>
+          <a:noFill/>
+        </p:spPr>
+        <p:txBody>
+          <a:bodyPr wrap="square" anchor="t" lIns="0" rIns="0" tIns="0" bIns="0">
+            <a:spAutoFit/>
+          </a:bodyPr>
+          <a:lstStyle/>
+          <a:p>
+            <a:pPr algn="l"/>
+            <a:r>
+              <a:rPr sz="1600" b="0">
+                <a:solidFill>
+                  <a:srgbClr val="6A6A6A"/>
+                </a:solidFill>
+                <a:latin typeface="Calibri"/>
+              </a:rPr>
+              <a:t>Cost the attacker time, but the password came out every trial</a:t>
             </a:r>
           </a:p>
         </p:txBody>
@@ -4366,15 +6074,15 @@
                 <a:gridCol w="3759098"/>
                 <a:gridCol w="3759099"/>
               </a:tblGrid>
-              <a:tr h="438912">
-                <a:tc>
-                  <a:txBody>
-                    <a:bodyPr/>
-                    <a:lstStyle/>
-                    <a:p>
-                      <a:pPr algn="l"/>
-                      <a:r>
-                        <a:rPr sz="1400" b="1">
+              <a:tr h="399010">
+                <a:tc>
+                  <a:txBody>
+                    <a:bodyPr/>
+                    <a:lstStyle/>
+                    <a:p>
+                      <a:pPr algn="l"/>
+                      <a:r>
+                        <a:rPr sz="1300" b="1">
                           <a:solidFill>
                             <a:srgbClr val="FFFFFF"/>
                           </a:solidFill>
@@ -4397,13 +6105,13 @@
                     <a:p>
                       <a:pPr algn="l"/>
                       <a:r>
-                        <a:rPr sz="1400" b="1">
+                        <a:rPr sz="1300" b="1">
                           <a:solidFill>
                             <a:srgbClr val="FFFFFF"/>
                           </a:solidFill>
                           <a:latin typeface="Calibri"/>
                         </a:rPr>
-                        <a:t>Median elapsed</a:t>
+                        <a:t>Median time</a:t>
                       </a:r>
                     </a:p>
                   </a:txBody>
@@ -4420,13 +6128,13 @@
                     <a:p>
                       <a:pPr algn="l"/>
                       <a:r>
-                        <a:rPr sz="1400" b="1">
+                        <a:rPr sz="1300" b="1">
                           <a:solidFill>
                             <a:srgbClr val="FFFFFF"/>
                           </a:solidFill>
                           <a:latin typeface="Calibri"/>
                         </a:rPr>
-                        <a:t>Note</a:t>
+                        <a:t>Slowdown vs baseline</a:t>
                       </a:r>
                     </a:p>
                   </a:txBody>
@@ -4437,21 +6145,21 @@
                   </a:tcPr>
                 </a:tc>
               </a:tr>
-              <a:tr h="438912">
-                <a:tc>
-                  <a:txBody>
-                    <a:bodyPr/>
-                    <a:lstStyle/>
-                    <a:p>
-                      <a:pPr algn="l"/>
-                      <a:r>
-                        <a:rPr sz="1400">
-                          <a:solidFill>
-                            <a:srgbClr val="1A3B5C"/>
-                          </a:solidFill>
-                          <a:latin typeface="Calibri"/>
-                        </a:rPr>
-                        <a:t>B_account_lockout</a:t>
+              <a:tr h="399010">
+                <a:tc>
+                  <a:txBody>
+                    <a:bodyPr/>
+                    <a:lstStyle/>
+                    <a:p>
+                      <a:pPr algn="l"/>
+                      <a:r>
+                        <a:rPr sz="1300">
+                          <a:solidFill>
+                            <a:srgbClr val="1F1F1F"/>
+                          </a:solidFill>
+                          <a:latin typeface="Calibri"/>
+                        </a:rPr>
+                        <a:t>A_baseline</a:t>
                       </a:r>
                     </a:p>
                   </a:txBody>
@@ -4468,13 +6176,13 @@
                     <a:p>
                       <a:pPr algn="l"/>
                       <a:r>
-                        <a:rPr sz="1400">
+                        <a:rPr sz="1300">
                           <a:solidFill>
                             <a:srgbClr val="1F1F1F"/>
                           </a:solidFill>
                           <a:latin typeface="Calibri"/>
                         </a:rPr>
-                        <a:t>3.4s</a:t>
+                        <a:t>14.5s</a:t>
                       </a:r>
                     </a:p>
                   </a:txBody>
@@ -4491,13 +6199,13 @@
                     <a:p>
                       <a:pPr algn="l"/>
                       <a:r>
-                        <a:rPr sz="1400">
+                        <a:rPr sz="1300">
                           <a:solidFill>
                             <a:srgbClr val="1F1F1F"/>
                           </a:solidFill>
                           <a:latin typeface="Calibri"/>
                         </a:rPr>
-                        <a:t>5 fail -&gt; 60s account lock</a:t>
+                        <a:t>1.0x</a:t>
                       </a:r>
                     </a:p>
                   </a:txBody>
@@ -4508,21 +6216,21 @@
                   </a:tcPr>
                 </a:tc>
               </a:tr>
-              <a:tr h="438912">
-                <a:tc>
-                  <a:txBody>
-                    <a:bodyPr/>
-                    <a:lstStyle/>
-                    <a:p>
-                      <a:pPr algn="l"/>
-                      <a:r>
-                        <a:rPr sz="1400">
-                          <a:solidFill>
-                            <a:srgbClr val="1A3B5C"/>
-                          </a:solidFill>
-                          <a:latin typeface="Calibri"/>
-                        </a:rPr>
-                        <a:t>C_ip_rate_limit</a:t>
+              <a:tr h="399010">
+                <a:tc>
+                  <a:txBody>
+                    <a:bodyPr/>
+                    <a:lstStyle/>
+                    <a:p>
+                      <a:pPr algn="l"/>
+                      <a:r>
+                        <a:rPr sz="1300">
+                          <a:solidFill>
+                            <a:srgbClr val="D33636"/>
+                          </a:solidFill>
+                          <a:latin typeface="Calibri"/>
+                        </a:rPr>
+                        <a:t>K2_slow_hash_scrypt</a:t>
                       </a:r>
                     </a:p>
                   </a:txBody>
@@ -4539,13 +6247,13 @@
                     <a:p>
                       <a:pPr algn="l"/>
                       <a:r>
-                        <a:rPr sz="1400">
+                        <a:rPr sz="1300">
                           <a:solidFill>
                             <a:srgbClr val="1F1F1F"/>
                           </a:solidFill>
                           <a:latin typeface="Calibri"/>
                         </a:rPr>
-                        <a:t>4.8s</a:t>
+                        <a:t>14.4s</a:t>
                       </a:r>
                     </a:p>
                   </a:txBody>
@@ -4562,13 +6270,109 @@
                     <a:p>
                       <a:pPr algn="l"/>
                       <a:r>
-                        <a:rPr sz="1400">
+                        <a:rPr sz="1300">
+                          <a:solidFill>
+                            <a:srgbClr val="D33636"/>
+                          </a:solidFill>
+                          <a:latin typeface="Calibri"/>
+                        </a:rPr>
+                        <a:t>1.0x - no slowdown</a:t>
+                      </a:r>
+                    </a:p>
+                  </a:txBody>
+                  <a:tcPr>
+                    <a:solidFill>
+                      <a:srgbClr val="F0F4F8"/>
+                    </a:solidFill>
+                  </a:tcPr>
+                </a:tc>
+              </a:tr>
+              <a:tr h="399010">
+                <a:tc>
+                  <a:txBody>
+                    <a:bodyPr/>
+                    <a:lstStyle/>
+                    <a:p>
+                      <a:pPr algn="l"/>
+                      <a:r>
+                        <a:rPr sz="1300">
                           <a:solidFill>
                             <a:srgbClr val="1F1F1F"/>
                           </a:solidFill>
                           <a:latin typeface="Calibri"/>
                         </a:rPr>
-                        <a:t>10 attempts / 30s window</a:t>
+                        <a:t>M2_anomaly_normal_ua</a:t>
+                      </a:r>
+                    </a:p>
+                  </a:txBody>
+                  <a:tcPr>
+                    <a:solidFill>
+                      <a:srgbClr val="FFFFFF"/>
+                    </a:solidFill>
+                  </a:tcPr>
+                </a:tc>
+                <a:tc>
+                  <a:txBody>
+                    <a:bodyPr/>
+                    <a:lstStyle/>
+                    <a:p>
+                      <a:pPr algn="l"/>
+                      <a:r>
+                        <a:rPr sz="1300">
+                          <a:solidFill>
+                            <a:srgbClr val="1F1F1F"/>
+                          </a:solidFill>
+                          <a:latin typeface="Calibri"/>
+                        </a:rPr>
+                        <a:t>14.4s</a:t>
+                      </a:r>
+                    </a:p>
+                  </a:txBody>
+                  <a:tcPr>
+                    <a:solidFill>
+                      <a:srgbClr val="FFFFFF"/>
+                    </a:solidFill>
+                  </a:tcPr>
+                </a:tc>
+                <a:tc>
+                  <a:txBody>
+                    <a:bodyPr/>
+                    <a:lstStyle/>
+                    <a:p>
+                      <a:pPr algn="l"/>
+                      <a:r>
+                        <a:rPr sz="1300">
+                          <a:solidFill>
+                            <a:srgbClr val="1F1F1F"/>
+                          </a:solidFill>
+                          <a:latin typeface="Calibri"/>
+                        </a:rPr>
+                        <a:t>1.0x - bypassed by spoofed UA</a:t>
+                      </a:r>
+                    </a:p>
+                  </a:txBody>
+                  <a:tcPr>
+                    <a:solidFill>
+                      <a:srgbClr val="FFFFFF"/>
+                    </a:solidFill>
+                  </a:tcPr>
+                </a:tc>
+              </a:tr>
+              <a:tr h="399010">
+                <a:tc>
+                  <a:txBody>
+                    <a:bodyPr/>
+                    <a:lstStyle/>
+                    <a:p>
+                      <a:pPr algn="l"/>
+                      <a:r>
+                        <a:rPr sz="1300">
+                          <a:solidFill>
+                            <a:srgbClr val="1F1F1F"/>
+                          </a:solidFill>
+                          <a:latin typeface="Calibri"/>
+                        </a:rPr>
+                        <a:t>J2_captcha_human</a:t>
                       </a:r>
                     </a:p>
                   </a:txBody>
@@ -4578,22 +6382,68 @@
                     </a:solidFill>
                   </a:tcPr>
                 </a:tc>
+                <a:tc>
+                  <a:txBody>
+                    <a:bodyPr/>
+                    <a:lstStyle/>
+                    <a:p>
+                      <a:pPr algn="l"/>
+                      <a:r>
+                        <a:rPr sz="1300">
+                          <a:solidFill>
+                            <a:srgbClr val="1F1F1F"/>
+                          </a:solidFill>
+                          <a:latin typeface="Calibri"/>
+                        </a:rPr>
+                        <a:t>14.5s</a:t>
+                      </a:r>
+                    </a:p>
+                  </a:txBody>
+                  <a:tcPr>
+                    <a:solidFill>
+                      <a:srgbClr val="F0F4F8"/>
+                    </a:solidFill>
+                  </a:tcPr>
+                </a:tc>
+                <a:tc>
+                  <a:txBody>
+                    <a:bodyPr/>
+                    <a:lstStyle/>
+                    <a:p>
+                      <a:pPr algn="l"/>
+                      <a:r>
+                        <a:rPr sz="1300">
+                          <a:solidFill>
+                            <a:srgbClr val="1F1F1F"/>
+                          </a:solidFill>
+                          <a:latin typeface="Calibri"/>
+                        </a:rPr>
+                        <a:t>1.0x</a:t>
+                      </a:r>
+                    </a:p>
+                  </a:txBody>
+                  <a:tcPr>
+                    <a:solidFill>
+                      <a:srgbClr val="F0F4F8"/>
+                    </a:solidFill>
+                  </a:tcPr>
+                </a:tc>
               </a:tr>
-              <a:tr h="438912">
-                <a:tc>
-                  <a:txBody>
-                    <a:bodyPr/>
-                    <a:lstStyle/>
-                    <a:p>
-                      <a:pPr algn="l"/>
-                      <a:r>
-                        <a:rPr sz="1400">
-                          <a:solidFill>
-                            <a:srgbClr val="1A3B5C"/>
-                          </a:solidFill>
-                          <a:latin typeface="Calibri"/>
-                        </a:rPr>
-                        <a:t>E_ip_exp_backoff</a:t>
+              <a:tr h="399010">
+                <a:tc>
+                  <a:txBody>
+                    <a:bodyPr/>
+                    <a:lstStyle/>
+                    <a:p>
+                      <a:pPr algn="l"/>
+                      <a:r>
+                        <a:rPr sz="1300">
+                          <a:solidFill>
+                            <a:srgbClr val="1F1F1F"/>
+                          </a:solidFill>
+                          <a:latin typeface="Calibri"/>
+                        </a:rPr>
+                        <a:t>F_pow_smart_attacker (18-bit)</a:t>
                       </a:r>
                     </a:p>
                   </a:txBody>
@@ -4610,13 +6460,13 @@
                     <a:p>
                       <a:pPr algn="l"/>
                       <a:r>
-                        <a:rPr sz="1400">
+                        <a:rPr sz="1300">
                           <a:solidFill>
                             <a:srgbClr val="1F1F1F"/>
                           </a:solidFill>
                           <a:latin typeface="Calibri"/>
                         </a:rPr>
-                        <a:t>3.5s</a:t>
+                        <a:t>34.4s</a:t>
                       </a:r>
                     </a:p>
                   </a:txBody>
@@ -4633,13 +6483,13 @@
                     <a:p>
                       <a:pPr algn="l"/>
                       <a:r>
-                        <a:rPr sz="1400">
+                        <a:rPr sz="1300">
                           <a:solidFill>
                             <a:srgbClr val="1F1F1F"/>
                           </a:solidFill>
                           <a:latin typeface="Calibri"/>
                         </a:rPr>
-                        <a:t>0.25s base, doubles, cap 8s</a:t>
+                        <a:t>2.4x</a:t>
                       </a:r>
                     </a:p>
                   </a:txBody>
@@ -4650,21 +6500,21 @@
                   </a:tcPr>
                 </a:tc>
               </a:tr>
-              <a:tr h="438912">
-                <a:tc>
-                  <a:txBody>
-                    <a:bodyPr/>
-                    <a:lstStyle/>
-                    <a:p>
-                      <a:pPr algn="l"/>
-                      <a:r>
-                        <a:rPr sz="1400">
-                          <a:solidFill>
-                            <a:srgbClr val="1A3B5C"/>
-                          </a:solidFill>
-                          <a:latin typeface="Calibri"/>
-                        </a:rPr>
-                        <a:t>I_perma_ban</a:t>
+              <a:tr h="399010">
+                <a:tc>
+                  <a:txBody>
+                    <a:bodyPr/>
+                    <a:lstStyle/>
+                    <a:p>
+                      <a:pPr algn="l"/>
+                      <a:r>
+                        <a:rPr sz="1300">
+                          <a:solidFill>
+                            <a:srgbClr val="1F1F1F"/>
+                          </a:solidFill>
+                          <a:latin typeface="Calibri"/>
+                        </a:rPr>
+                        <a:t>D_tarpit_500ms</a:t>
                       </a:r>
                     </a:p>
                   </a:txBody>
@@ -4681,13 +6531,13 @@
                     <a:p>
                       <a:pPr algn="l"/>
                       <a:r>
-                        <a:rPr sz="1400">
+                        <a:rPr sz="1300">
                           <a:solidFill>
                             <a:srgbClr val="1F1F1F"/>
                           </a:solidFill>
                           <a:latin typeface="Calibri"/>
                         </a:rPr>
-                        <a:t>3.8s</a:t>
+                        <a:t>64.0s</a:t>
                       </a:r>
                     </a:p>
                   </a:txBody>
@@ -4704,13 +6554,13 @@
                     <a:p>
                       <a:pPr algn="l"/>
                       <a:r>
-                        <a:rPr sz="1400">
+                        <a:rPr sz="1300">
                           <a:solidFill>
                             <a:srgbClr val="1F1F1F"/>
                           </a:solidFill>
                           <a:latin typeface="Calibri"/>
                         </a:rPr>
-                        <a:t>8 failures -&gt; blacklist</a:t>
+                        <a:t>4.4x</a:t>
                       </a:r>
                     </a:p>
                   </a:txBody>
@@ -4721,21 +6571,21 @@
                   </a:tcPr>
                 </a:tc>
               </a:tr>
-              <a:tr h="438912">
-                <a:tc>
-                  <a:txBody>
-                    <a:bodyPr/>
-                    <a:lstStyle/>
-                    <a:p>
-                      <a:pPr algn="l"/>
-                      <a:r>
-                        <a:rPr sz="1400">
-                          <a:solidFill>
-                            <a:srgbClr val="1A3B5C"/>
-                          </a:solidFill>
-                          <a:latin typeface="Calibri"/>
-                        </a:rPr>
-                        <a:t>G_pow_naive_attacker</a:t>
+              <a:tr h="399010">
+                <a:tc>
+                  <a:txBody>
+                    <a:bodyPr/>
+                    <a:lstStyle/>
+                    <a:p>
+                      <a:pPr algn="l"/>
+                      <a:r>
+                        <a:rPr sz="1300">
+                          <a:solidFill>
+                            <a:srgbClr val="1F1F1F"/>
+                          </a:solidFill>
+                          <a:latin typeface="Calibri"/>
+                        </a:rPr>
+                        <a:t>K_slow_hash_pbkdf2 (600k iters)</a:t>
                       </a:r>
                     </a:p>
                   </a:txBody>
@@ -4752,13 +6602,13 @@
                     <a:p>
                       <a:pPr algn="l"/>
                       <a:r>
-                        <a:rPr sz="1400">
+                        <a:rPr sz="1300">
                           <a:solidFill>
                             <a:srgbClr val="1F1F1F"/>
                           </a:solidFill>
                           <a:latin typeface="Calibri"/>
                         </a:rPr>
-                        <a:t>3.7s</a:t>
+                        <a:t>83.5s</a:t>
                       </a:r>
                     </a:p>
                   </a:txBody>
@@ -4775,13 +6625,13 @@
                     <a:p>
                       <a:pPr algn="l"/>
                       <a:r>
-                        <a:rPr sz="1400">
+                        <a:rPr sz="1300">
                           <a:solidFill>
                             <a:srgbClr val="1F1F1F"/>
                           </a:solidFill>
                           <a:latin typeface="Calibri"/>
                         </a:rPr>
-                        <a:t>PoW vs bot with no solver</a:t>
+                        <a:t>5.8x</a:t>
                       </a:r>
                     </a:p>
                   </a:txBody>
@@ -4792,21 +6642,21 @@
                   </a:tcPr>
                 </a:tc>
               </a:tr>
-              <a:tr h="438912">
-                <a:tc>
-                  <a:txBody>
-                    <a:bodyPr/>
-                    <a:lstStyle/>
-                    <a:p>
-                      <a:pPr algn="l"/>
-                      <a:r>
-                        <a:rPr sz="1400">
-                          <a:solidFill>
-                            <a:srgbClr val="1A3B5C"/>
-                          </a:solidFill>
-                          <a:latin typeface="Calibri"/>
-                        </a:rPr>
-                        <a:t>J_captcha_naive</a:t>
+              <a:tr h="399010">
+                <a:tc>
+                  <a:txBody>
+                    <a:bodyPr/>
+                    <a:lstStyle/>
+                    <a:p>
+                      <a:pPr algn="l"/>
+                      <a:r>
+                        <a:rPr sz="1300">
+                          <a:solidFill>
+                            <a:srgbClr val="1F1F1F"/>
+                          </a:solidFill>
+                          <a:latin typeface="Calibri"/>
+                        </a:rPr>
+                        <a:t>D2_tarpit_1s</a:t>
                       </a:r>
                     </a:p>
                   </a:txBody>
@@ -4823,13 +6673,13 @@
                     <a:p>
                       <a:pPr algn="l"/>
                       <a:r>
-                        <a:rPr sz="1400">
+                        <a:rPr sz="1300">
                           <a:solidFill>
                             <a:srgbClr val="1F1F1F"/>
                           </a:solidFill>
                           <a:latin typeface="Calibri"/>
                         </a:rPr>
-                        <a:t>4.5s</a:t>
+                        <a:t>113.5s</a:t>
                       </a:r>
                     </a:p>
                   </a:txBody>
@@ -4846,13 +6696,13 @@
                     <a:p>
                       <a:pPr algn="l"/>
                       <a:r>
-                        <a:rPr sz="1400">
+                        <a:rPr sz="1300">
                           <a:solidFill>
                             <a:srgbClr val="1F1F1F"/>
                           </a:solidFill>
                           <a:latin typeface="Calibri"/>
                         </a:rPr>
-                        <a:t>CAPTCHA vs bot with no solver</a:t>
+                        <a:t>7.8x</a:t>
                       </a:r>
                     </a:p>
                   </a:txBody>
@@ -4863,21 +6713,21 @@
                   </a:tcPr>
                 </a:tc>
               </a:tr>
-              <a:tr h="438912">
-                <a:tc>
-                  <a:txBody>
-                    <a:bodyPr/>
-                    <a:lstStyle/>
-                    <a:p>
-                      <a:pPr algn="l"/>
-                      <a:r>
-                        <a:rPr sz="1400">
-                          <a:solidFill>
-                            <a:srgbClr val="1A3B5C"/>
-                          </a:solidFill>
-                          <a:latin typeface="Calibri"/>
-                        </a:rPr>
-                        <a:t>L_honeypot_username</a:t>
+              <a:tr h="399010">
+                <a:tc>
+                  <a:txBody>
+                    <a:bodyPr/>
+                    <a:lstStyle/>
+                    <a:p>
+                      <a:pPr algn="l"/>
+                      <a:r>
+                        <a:rPr sz="1300">
+                          <a:solidFill>
+                            <a:srgbClr val="1F1F1F"/>
+                          </a:solidFill>
+                          <a:latin typeface="Calibri"/>
+                        </a:rPr>
+                        <a:t>D3_tarpit_2s</a:t>
                       </a:r>
                     </a:p>
                   </a:txBody>
@@ -4894,13 +6744,13 @@
                     <a:p>
                       <a:pPr algn="l"/>
                       <a:r>
-                        <a:rPr sz="1400">
+                        <a:rPr sz="1300">
                           <a:solidFill>
                             <a:srgbClr val="1F1F1F"/>
                           </a:solidFill>
                           <a:latin typeface="Calibri"/>
                         </a:rPr>
-                        <a:t>3.2s</a:t>
+                        <a:t>212.5s</a:t>
                       </a:r>
                     </a:p>
                   </a:txBody>
@@ -4917,38 +6767,61 @@
                     <a:p>
                       <a:pPr algn="l"/>
                       <a:r>
-                        <a:rPr sz="1400">
+                        <a:rPr sz="1300">
+                          <a:solidFill>
+                            <a:srgbClr val="2D8F5A"/>
+                          </a:solidFill>
+                          <a:latin typeface="Calibri"/>
+                        </a:rPr>
+                        <a:t>14.7x</a:t>
+                      </a:r>
+                    </a:p>
+                  </a:txBody>
+                  <a:tcPr>
+                    <a:solidFill>
+                      <a:srgbClr val="FFFFFF"/>
+                    </a:solidFill>
+                  </a:tcPr>
+                </a:tc>
+              </a:tr>
+              <a:tr h="399020">
+                <a:tc>
+                  <a:txBody>
+                    <a:bodyPr/>
+                    <a:lstStyle/>
+                    <a:p>
+                      <a:pPr algn="l"/>
+                      <a:r>
+                        <a:rPr sz="1300">
+                          <a:solidFill>
+                            <a:srgbClr val="C87A00"/>
+                          </a:solidFill>
+                          <a:latin typeface="Calibri"/>
+                        </a:rPr>
+                        <a:t>F2_pow_22bit (smart, 22-bit)</a:t>
+                      </a:r>
+                    </a:p>
+                  </a:txBody>
+                  <a:tcPr>
+                    <a:solidFill>
+                      <a:srgbClr val="F0F4F8"/>
+                    </a:solidFill>
+                  </a:tcPr>
+                </a:tc>
+                <a:tc>
+                  <a:txBody>
+                    <a:bodyPr/>
+                    <a:lstStyle/>
+                    <a:p>
+                      <a:pPr algn="l"/>
+                      <a:r>
+                        <a:rPr sz="1300">
                           <a:solidFill>
                             <a:srgbClr val="1F1F1F"/>
                           </a:solidFill>
                           <a:latin typeface="Calibri"/>
                         </a:rPr>
-                        <a:t>Banned on first request</a:t>
-                      </a:r>
-                    </a:p>
-                  </a:txBody>
-                  <a:tcPr>
-                    <a:solidFill>
-                      <a:srgbClr val="FFFFFF"/>
-                    </a:solidFill>
-                  </a:tcPr>
-                </a:tc>
-              </a:tr>
-              <a:tr h="438912">
-                <a:tc>
-                  <a:txBody>
-                    <a:bodyPr/>
-                    <a:lstStyle/>
-                    <a:p>
-                      <a:pPr algn="l"/>
-                      <a:r>
-                        <a:rPr sz="1400">
-                          <a:solidFill>
-                            <a:srgbClr val="1A3B5C"/>
-                          </a:solidFill>
-                          <a:latin typeface="Calibri"/>
-                        </a:rPr>
-                        <a:t>M_anomaly_no_ua</a:t>
+                        <a:t>305.9s (82% breach)</a:t>
                       </a:r>
                     </a:p>
                   </a:txBody>
@@ -4965,113 +6838,19 @@
                     <a:p>
                       <a:pPr algn="l"/>
                       <a:r>
-                        <a:rPr sz="1400">
+                        <a:rPr sz="1300">
                           <a:solidFill>
                             <a:srgbClr val="1F1F1F"/>
                           </a:solidFill>
                           <a:latin typeface="Calibri"/>
                         </a:rPr>
-                        <a:t>3.7s</a:t>
+                        <a:t>21x</a:t>
                       </a:r>
                     </a:p>
                   </a:txBody>
                   <a:tcPr>
                     <a:solidFill>
                       <a:srgbClr val="F0F4F8"/>
-                    </a:solidFill>
-                  </a:tcPr>
-                </a:tc>
-                <a:tc>
-                  <a:txBody>
-                    <a:bodyPr/>
-                    <a:lstStyle/>
-                    <a:p>
-                      <a:pPr algn="l"/>
-                      <a:r>
-                        <a:rPr sz="1400">
-                          <a:solidFill>
-                            <a:srgbClr val="1F1F1F"/>
-                          </a:solidFill>
-                          <a:latin typeface="Calibri"/>
-                        </a:rPr>
-                        <a:t>Missing User-Agent flagged</a:t>
-                      </a:r>
-                    </a:p>
-                  </a:txBody>
-                  <a:tcPr>
-                    <a:solidFill>
-                      <a:srgbClr val="F0F4F8"/>
-                    </a:solidFill>
-                  </a:tcPr>
-                </a:tc>
-              </a:tr>
-              <a:tr h="438912">
-                <a:tc>
-                  <a:txBody>
-                    <a:bodyPr/>
-                    <a:lstStyle/>
-                    <a:p>
-                      <a:pPr algn="l"/>
-                      <a:r>
-                        <a:rPr sz="1400">
-                          <a:solidFill>
-                            <a:srgbClr val="1A3B5C"/>
-                          </a:solidFill>
-                          <a:latin typeface="Calibri"/>
-                        </a:rPr>
-                        <a:t>H/H2/H3 layered</a:t>
-                      </a:r>
-                    </a:p>
-                  </a:txBody>
-                  <a:tcPr>
-                    <a:solidFill>
-                      <a:srgbClr val="FFFFFF"/>
-                    </a:solidFill>
-                  </a:tcPr>
-                </a:tc>
-                <a:tc>
-                  <a:txBody>
-                    <a:bodyPr/>
-                    <a:lstStyle/>
-                    <a:p>
-                      <a:pPr algn="l"/>
-                      <a:r>
-                        <a:rPr sz="1400">
-                          <a:solidFill>
-                            <a:srgbClr val="1F1F1F"/>
-                          </a:solidFill>
-                          <a:latin typeface="Calibri"/>
-                        </a:rPr>
-                        <a:t>~ 30s</a:t>
-                      </a:r>
-                    </a:p>
-                  </a:txBody>
-                  <a:tcPr>
-                    <a:solidFill>
-                      <a:srgbClr val="FFFFFF"/>
-                    </a:solidFill>
-                  </a:tcPr>
-                </a:tc>
-                <a:tc>
-                  <a:txBody>
-                    <a:bodyPr/>
-                    <a:lstStyle/>
-                    <a:p>
-                      <a:pPr algn="l"/>
-                      <a:r>
-                        <a:rPr sz="1400">
-                          <a:solidFill>
-                            <a:srgbClr val="1F1F1F"/>
-                          </a:solidFill>
-                          <a:latin typeface="Calibri"/>
-                        </a:rPr>
-                        <a:t>All three layered configs</a:t>
-                      </a:r>
-                    </a:p>
-                  </a:txBody>
-                  <a:tcPr>
-                    <a:solidFill>
-                      <a:srgbClr val="FFFFFF"/>
                     </a:solidFill>
                   </a:tcPr>
                 </a:tc>
@@ -5080,77 +6859,16 @@
           </a:graphicData>
         </a:graphic>
       </p:graphicFrame>
-    </p:spTree>
-  </p:cSld>
-  <p:clrMapOvr>
-    <a:masterClrMapping/>
-  </p:clrMapOvr>
-</p:sld>
-</file>
-
-<file path=ppt/slides/slide14.xml><?xml version="1.0" encoding="utf-8"?>
-<p:sld xmlns:a="http://schemas.openxmlformats.org/drawingml/2006/main" xmlns:p="http://schemas.openxmlformats.org/presentationml/2006/main" xmlns:r="http://schemas.openxmlformats.org/officeDocument/2006/relationships">
-  <p:cSld>
-    <p:spTree>
-      <p:nvGrpSpPr>
-        <p:cNvPr id="1" name=""/>
-        <p:cNvGrpSpPr/>
-        <p:nvPr/>
-      </p:nvGrpSpPr>
-      <p:grpSpPr/>
-      <p:sp>
-        <p:nvSpPr>
-          <p:cNvPr id="2" name="Rectangle 1"/>
-          <p:cNvSpPr/>
-          <p:nvPr/>
-        </p:nvSpPr>
-        <p:spPr>
-          <a:xfrm>
-            <a:off x="0" y="0"/>
-            <a:ext cx="12191695" cy="91440"/>
-          </a:xfrm>
-          <a:prstGeom prst="rect">
-            <a:avLst/>
-          </a:prstGeom>
-          <a:solidFill>
-            <a:srgbClr val="1A3B5C"/>
-          </a:solidFill>
-          <a:ln>
-            <a:noFill/>
-          </a:ln>
-        </p:spPr>
-        <p:style>
-          <a:lnRef idx="1">
-            <a:schemeClr val="accent1"/>
-          </a:lnRef>
-          <a:fillRef idx="3">
-            <a:schemeClr val="accent1"/>
-          </a:fillRef>
-          <a:effectRef idx="2">
-            <a:schemeClr val="accent1"/>
-          </a:effectRef>
-          <a:fontRef idx="minor">
-            <a:schemeClr val="lt1"/>
-          </a:fontRef>
-        </p:style>
-        <p:txBody>
-          <a:bodyPr rtlCol="0" anchor="ctr"/>
-          <a:lstStyle/>
-          <a:p>
-            <a:pPr algn="ctr"/>
-          </a:p>
-        </p:txBody>
-      </p:sp>
-      <p:sp>
-        <p:nvSpPr>
-          <p:cNvPr id="3" name="TextBox 2"/>
+      <p:sp>
+        <p:nvSpPr>
+          <p:cNvPr id="6" name="TextBox 5"/>
           <p:cNvSpPr txBox="1"/>
           <p:nvPr/>
         </p:nvSpPr>
         <p:spPr>
           <a:xfrm>
-            <a:off x="457200" y="228600"/>
-            <a:ext cx="11277295" cy="640080"/>
+            <a:off x="457200" y="6035040"/>
+            <a:ext cx="11277295" cy="548640"/>
           </a:xfrm>
           <a:prstGeom prst="rect">
             <a:avLst/>
@@ -5165,1127 +6883,13 @@
           <a:p>
             <a:pPr algn="l"/>
             <a:r>
-              <a:rPr sz="3000" b="1">
-                <a:solidFill>
-                  <a:srgbClr val="1A3B5C"/>
-                </a:solidFill>
-                <a:latin typeface="Calibri"/>
-              </a:rPr>
-              <a:t>Slow-downs only</a:t>
-            </a:r>
-          </a:p>
-        </p:txBody>
-      </p:sp>
-      <p:sp>
-        <p:nvSpPr>
-          <p:cNvPr id="4" name="TextBox 3"/>
-          <p:cNvSpPr txBox="1"/>
-          <p:nvPr/>
-        </p:nvSpPr>
-        <p:spPr>
-          <a:xfrm>
-            <a:off x="457200" y="868680"/>
-            <a:ext cx="11277295" cy="365760"/>
-          </a:xfrm>
-          <a:prstGeom prst="rect">
-            <a:avLst/>
-          </a:prstGeom>
-          <a:noFill/>
-        </p:spPr>
-        <p:txBody>
-          <a:bodyPr wrap="square" anchor="t" lIns="0" rIns="0" tIns="0" bIns="0">
-            <a:spAutoFit/>
-          </a:bodyPr>
-          <a:lstStyle/>
-          <a:p>
-            <a:pPr algn="l"/>
-            <a:r>
-              <a:rPr sz="1600" b="0">
+              <a:rPr sz="1400" b="0">
                 <a:solidFill>
                   <a:srgbClr val="6A6A6A"/>
                 </a:solidFill>
                 <a:latin typeface="Calibri"/>
               </a:rPr>
-              <a:t>Cost the attacker time, but the password came out</a:t>
-            </a:r>
-          </a:p>
-        </p:txBody>
-      </p:sp>
-      <p:graphicFrame>
-        <p:nvGraphicFramePr>
-          <p:cNvPr id="5" name="Table 4"/>
-          <p:cNvGraphicFramePr>
-            <a:graphicFrameLocks noGrp="1"/>
-          </p:cNvGraphicFramePr>
-          <p:nvPr/>
-        </p:nvGraphicFramePr>
-        <p:xfrm>
-          <a:off x="457200" y="1554480"/>
-          <a:ext cx="11277295" cy="4206240"/>
-        </p:xfrm>
-        <a:graphic>
-          <a:graphicData uri="http://schemas.openxmlformats.org/drawingml/2006/table">
-            <a:tbl>
-              <a:tblPr firstRow="1" bandRow="1">
-                <a:tableStyleId>{5C22544A-7EE6-4342-B048-85BDC9FD1C3A}</a:tableStyleId>
-              </a:tblPr>
-              <a:tblGrid>
-                <a:gridCol w="3759098"/>
-                <a:gridCol w="3759098"/>
-                <a:gridCol w="3759099"/>
-              </a:tblGrid>
-              <a:tr h="420624">
-                <a:tc>
-                  <a:txBody>
-                    <a:bodyPr/>
-                    <a:lstStyle/>
-                    <a:p>
-                      <a:pPr algn="l"/>
-                      <a:r>
-                        <a:rPr sz="1400" b="1">
-                          <a:solidFill>
-                            <a:srgbClr val="FFFFFF"/>
-                          </a:solidFill>
-                          <a:latin typeface="Calibri"/>
-                        </a:rPr>
-                        <a:t>Config</a:t>
-                      </a:r>
-                    </a:p>
-                  </a:txBody>
-                  <a:tcPr>
-                    <a:solidFill>
-                      <a:srgbClr val="1A3B5C"/>
-                    </a:solidFill>
-                  </a:tcPr>
-                </a:tc>
-                <a:tc>
-                  <a:txBody>
-                    <a:bodyPr/>
-                    <a:lstStyle/>
-                    <a:p>
-                      <a:pPr algn="l"/>
-                      <a:r>
-                        <a:rPr sz="1400" b="1">
-                          <a:solidFill>
-                            <a:srgbClr val="FFFFFF"/>
-                          </a:solidFill>
-                          <a:latin typeface="Calibri"/>
-                        </a:rPr>
-                        <a:t>Median time</a:t>
-                      </a:r>
-                    </a:p>
-                  </a:txBody>
-                  <a:tcPr>
-                    <a:solidFill>
-                      <a:srgbClr val="1A3B5C"/>
-                    </a:solidFill>
-                  </a:tcPr>
-                </a:tc>
-                <a:tc>
-                  <a:txBody>
-                    <a:bodyPr/>
-                    <a:lstStyle/>
-                    <a:p>
-                      <a:pPr algn="l"/>
-                      <a:r>
-                        <a:rPr sz="1400" b="1">
-                          <a:solidFill>
-                            <a:srgbClr val="FFFFFF"/>
-                          </a:solidFill>
-                          <a:latin typeface="Calibri"/>
-                        </a:rPr>
-                        <a:t>Slowdown vs baseline</a:t>
-                      </a:r>
-                    </a:p>
-                  </a:txBody>
-                  <a:tcPr>
-                    <a:solidFill>
-                      <a:srgbClr val="1A3B5C"/>
-                    </a:solidFill>
-                  </a:tcPr>
-                </a:tc>
-              </a:tr>
-              <a:tr h="420624">
-                <a:tc>
-                  <a:txBody>
-                    <a:bodyPr/>
-                    <a:lstStyle/>
-                    <a:p>
-                      <a:pPr algn="l"/>
-                      <a:r>
-                        <a:rPr sz="1400">
-                          <a:solidFill>
-                            <a:srgbClr val="1F1F1F"/>
-                          </a:solidFill>
-                          <a:latin typeface="Calibri"/>
-                        </a:rPr>
-                        <a:t>A_baseline</a:t>
-                      </a:r>
-                    </a:p>
-                  </a:txBody>
-                  <a:tcPr>
-                    <a:solidFill>
-                      <a:srgbClr val="FFFFFF"/>
-                    </a:solidFill>
-                  </a:tcPr>
-                </a:tc>
-                <a:tc>
-                  <a:txBody>
-                    <a:bodyPr/>
-                    <a:lstStyle/>
-                    <a:p>
-                      <a:pPr algn="l"/>
-                      <a:r>
-                        <a:rPr sz="1400">
-                          <a:solidFill>
-                            <a:srgbClr val="1F1F1F"/>
-                          </a:solidFill>
-                          <a:latin typeface="Calibri"/>
-                        </a:rPr>
-                        <a:t>16s</a:t>
-                      </a:r>
-                    </a:p>
-                  </a:txBody>
-                  <a:tcPr>
-                    <a:solidFill>
-                      <a:srgbClr val="FFFFFF"/>
-                    </a:solidFill>
-                  </a:tcPr>
-                </a:tc>
-                <a:tc>
-                  <a:txBody>
-                    <a:bodyPr/>
-                    <a:lstStyle/>
-                    <a:p>
-                      <a:pPr algn="l"/>
-                      <a:r>
-                        <a:rPr sz="1400">
-                          <a:solidFill>
-                            <a:srgbClr val="1F1F1F"/>
-                          </a:solidFill>
-                          <a:latin typeface="Calibri"/>
-                        </a:rPr>
-                        <a:t>1x</a:t>
-                      </a:r>
-                    </a:p>
-                  </a:txBody>
-                  <a:tcPr>
-                    <a:solidFill>
-                      <a:srgbClr val="FFFFFF"/>
-                    </a:solidFill>
-                  </a:tcPr>
-                </a:tc>
-              </a:tr>
-              <a:tr h="420624">
-                <a:tc>
-                  <a:txBody>
-                    <a:bodyPr/>
-                    <a:lstStyle/>
-                    <a:p>
-                      <a:pPr algn="l"/>
-                      <a:r>
-                        <a:rPr sz="1400">
-                          <a:solidFill>
-                            <a:srgbClr val="D33636"/>
-                          </a:solidFill>
-                          <a:latin typeface="Calibri"/>
-                        </a:rPr>
-                        <a:t>K2_slow_hash_scrypt</a:t>
-                      </a:r>
-                    </a:p>
-                  </a:txBody>
-                  <a:tcPr>
-                    <a:solidFill>
-                      <a:srgbClr val="F0F4F8"/>
-                    </a:solidFill>
-                  </a:tcPr>
-                </a:tc>
-                <a:tc>
-                  <a:txBody>
-                    <a:bodyPr/>
-                    <a:lstStyle/>
-                    <a:p>
-                      <a:pPr algn="l"/>
-                      <a:r>
-                        <a:rPr sz="1400">
-                          <a:solidFill>
-                            <a:srgbClr val="1F1F1F"/>
-                          </a:solidFill>
-                          <a:latin typeface="Calibri"/>
-                        </a:rPr>
-                        <a:t>12s</a:t>
-                      </a:r>
-                    </a:p>
-                  </a:txBody>
-                  <a:tcPr>
-                    <a:solidFill>
-                      <a:srgbClr val="F0F4F8"/>
-                    </a:solidFill>
-                  </a:tcPr>
-                </a:tc>
-                <a:tc>
-                  <a:txBody>
-                    <a:bodyPr/>
-                    <a:lstStyle/>
-                    <a:p>
-                      <a:pPr algn="l"/>
-                      <a:r>
-                        <a:rPr sz="1400">
-                          <a:solidFill>
-                            <a:srgbClr val="D33636"/>
-                          </a:solidFill>
-                          <a:latin typeface="Calibri"/>
-                        </a:rPr>
-                        <a:t>0.7x - worse than baseline</a:t>
-                      </a:r>
-                    </a:p>
-                  </a:txBody>
-                  <a:tcPr>
-                    <a:solidFill>
-                      <a:srgbClr val="F0F4F8"/>
-                    </a:solidFill>
-                  </a:tcPr>
-                </a:tc>
-              </a:tr>
-              <a:tr h="420624">
-                <a:tc>
-                  <a:txBody>
-                    <a:bodyPr/>
-                    <a:lstStyle/>
-                    <a:p>
-                      <a:pPr algn="l"/>
-                      <a:r>
-                        <a:rPr sz="1400">
-                          <a:solidFill>
-                            <a:srgbClr val="1F1F1F"/>
-                          </a:solidFill>
-                          <a:latin typeface="Calibri"/>
-                        </a:rPr>
-                        <a:t>J2_captcha_human</a:t>
-                      </a:r>
-                    </a:p>
-                  </a:txBody>
-                  <a:tcPr>
-                    <a:solidFill>
-                      <a:srgbClr val="FFFFFF"/>
-                    </a:solidFill>
-                  </a:tcPr>
-                </a:tc>
-                <a:tc>
-                  <a:txBody>
-                    <a:bodyPr/>
-                    <a:lstStyle/>
-                    <a:p>
-                      <a:pPr algn="l"/>
-                      <a:r>
-                        <a:rPr sz="1400">
-                          <a:solidFill>
-                            <a:srgbClr val="1F1F1F"/>
-                          </a:solidFill>
-                          <a:latin typeface="Calibri"/>
-                        </a:rPr>
-                        <a:t>12s</a:t>
-                      </a:r>
-                    </a:p>
-                  </a:txBody>
-                  <a:tcPr>
-                    <a:solidFill>
-                      <a:srgbClr val="FFFFFF"/>
-                    </a:solidFill>
-                  </a:tcPr>
-                </a:tc>
-                <a:tc>
-                  <a:txBody>
-                    <a:bodyPr/>
-                    <a:lstStyle/>
-                    <a:p>
-                      <a:pPr algn="l"/>
-                      <a:r>
-                        <a:rPr sz="1400">
-                          <a:solidFill>
-                            <a:srgbClr val="1F1F1F"/>
-                          </a:solidFill>
-                          <a:latin typeface="Calibri"/>
-                        </a:rPr>
-                        <a:t>0.75x</a:t>
-                      </a:r>
-                    </a:p>
-                  </a:txBody>
-                  <a:tcPr>
-                    <a:solidFill>
-                      <a:srgbClr val="FFFFFF"/>
-                    </a:solidFill>
-                  </a:tcPr>
-                </a:tc>
-              </a:tr>
-              <a:tr h="420624">
-                <a:tc>
-                  <a:txBody>
-                    <a:bodyPr/>
-                    <a:lstStyle/>
-                    <a:p>
-                      <a:pPr algn="l"/>
-                      <a:r>
-                        <a:rPr sz="1400">
-                          <a:solidFill>
-                            <a:srgbClr val="1F1F1F"/>
-                          </a:solidFill>
-                          <a:latin typeface="Calibri"/>
-                        </a:rPr>
-                        <a:t>F_pow_smart_attacker (18-bit)</a:t>
-                      </a:r>
-                    </a:p>
-                  </a:txBody>
-                  <a:tcPr>
-                    <a:solidFill>
-                      <a:srgbClr val="F0F4F8"/>
-                    </a:solidFill>
-                  </a:tcPr>
-                </a:tc>
-                <a:tc>
-                  <a:txBody>
-                    <a:bodyPr/>
-                    <a:lstStyle/>
-                    <a:p>
-                      <a:pPr algn="l"/>
-                      <a:r>
-                        <a:rPr sz="1400">
-                          <a:solidFill>
-                            <a:srgbClr val="1F1F1F"/>
-                          </a:solidFill>
-                          <a:latin typeface="Calibri"/>
-                        </a:rPr>
-                        <a:t>14s</a:t>
-                      </a:r>
-                    </a:p>
-                  </a:txBody>
-                  <a:tcPr>
-                    <a:solidFill>
-                      <a:srgbClr val="F0F4F8"/>
-                    </a:solidFill>
-                  </a:tcPr>
-                </a:tc>
-                <a:tc>
-                  <a:txBody>
-                    <a:bodyPr/>
-                    <a:lstStyle/>
-                    <a:p>
-                      <a:pPr algn="l"/>
-                      <a:r>
-                        <a:rPr sz="1400">
-                          <a:solidFill>
-                            <a:srgbClr val="1F1F1F"/>
-                          </a:solidFill>
-                          <a:latin typeface="Calibri"/>
-                        </a:rPr>
-                        <a:t>0.9x</a:t>
-                      </a:r>
-                    </a:p>
-                  </a:txBody>
-                  <a:tcPr>
-                    <a:solidFill>
-                      <a:srgbClr val="F0F4F8"/>
-                    </a:solidFill>
-                  </a:tcPr>
-                </a:tc>
-              </a:tr>
-              <a:tr h="420624">
-                <a:tc>
-                  <a:txBody>
-                    <a:bodyPr/>
-                    <a:lstStyle/>
-                    <a:p>
-                      <a:pPr algn="l"/>
-                      <a:r>
-                        <a:rPr sz="1400">
-                          <a:solidFill>
-                            <a:srgbClr val="1F1F1F"/>
-                          </a:solidFill>
-                          <a:latin typeface="Calibri"/>
-                        </a:rPr>
-                        <a:t>K_slow_hash_pbkdf2 (600k iters)</a:t>
-                      </a:r>
-                    </a:p>
-                  </a:txBody>
-                  <a:tcPr>
-                    <a:solidFill>
-                      <a:srgbClr val="FFFFFF"/>
-                    </a:solidFill>
-                  </a:tcPr>
-                </a:tc>
-                <a:tc>
-                  <a:txBody>
-                    <a:bodyPr/>
-                    <a:lstStyle/>
-                    <a:p>
-                      <a:pPr algn="l"/>
-                      <a:r>
-                        <a:rPr sz="1400">
-                          <a:solidFill>
-                            <a:srgbClr val="1F1F1F"/>
-                          </a:solidFill>
-                          <a:latin typeface="Calibri"/>
-                        </a:rPr>
-                        <a:t>23s</a:t>
-                      </a:r>
-                    </a:p>
-                  </a:txBody>
-                  <a:tcPr>
-                    <a:solidFill>
-                      <a:srgbClr val="FFFFFF"/>
-                    </a:solidFill>
-                  </a:tcPr>
-                </a:tc>
-                <a:tc>
-                  <a:txBody>
-                    <a:bodyPr/>
-                    <a:lstStyle/>
-                    <a:p>
-                      <a:pPr algn="l"/>
-                      <a:r>
-                        <a:rPr sz="1400">
-                          <a:solidFill>
-                            <a:srgbClr val="1F1F1F"/>
-                          </a:solidFill>
-                          <a:latin typeface="Calibri"/>
-                        </a:rPr>
-                        <a:t>1.5x</a:t>
-                      </a:r>
-                    </a:p>
-                  </a:txBody>
-                  <a:tcPr>
-                    <a:solidFill>
-                      <a:srgbClr val="FFFFFF"/>
-                    </a:solidFill>
-                  </a:tcPr>
-                </a:tc>
-              </a:tr>
-              <a:tr h="420624">
-                <a:tc>
-                  <a:txBody>
-                    <a:bodyPr/>
-                    <a:lstStyle/>
-                    <a:p>
-                      <a:pPr algn="l"/>
-                      <a:r>
-                        <a:rPr sz="1400">
-                          <a:solidFill>
-                            <a:srgbClr val="1F1F1F"/>
-                          </a:solidFill>
-                          <a:latin typeface="Calibri"/>
-                        </a:rPr>
-                        <a:t>D_tarpit_500ms</a:t>
-                      </a:r>
-                    </a:p>
-                  </a:txBody>
-                  <a:tcPr>
-                    <a:solidFill>
-                      <a:srgbClr val="F0F4F8"/>
-                    </a:solidFill>
-                  </a:tcPr>
-                </a:tc>
-                <a:tc>
-                  <a:txBody>
-                    <a:bodyPr/>
-                    <a:lstStyle/>
-                    <a:p>
-                      <a:pPr algn="l"/>
-                      <a:r>
-                        <a:rPr sz="1400">
-                          <a:solidFill>
-                            <a:srgbClr val="1F1F1F"/>
-                          </a:solidFill>
-                          <a:latin typeface="Calibri"/>
-                        </a:rPr>
-                        <a:t>62s</a:t>
-                      </a:r>
-                    </a:p>
-                  </a:txBody>
-                  <a:tcPr>
-                    <a:solidFill>
-                      <a:srgbClr val="F0F4F8"/>
-                    </a:solidFill>
-                  </a:tcPr>
-                </a:tc>
-                <a:tc>
-                  <a:txBody>
-                    <a:bodyPr/>
-                    <a:lstStyle/>
-                    <a:p>
-                      <a:pPr algn="l"/>
-                      <a:r>
-                        <a:rPr sz="1400">
-                          <a:solidFill>
-                            <a:srgbClr val="1F1F1F"/>
-                          </a:solidFill>
-                          <a:latin typeface="Calibri"/>
-                        </a:rPr>
-                        <a:t>4x</a:t>
-                      </a:r>
-                    </a:p>
-                  </a:txBody>
-                  <a:tcPr>
-                    <a:solidFill>
-                      <a:srgbClr val="F0F4F8"/>
-                    </a:solidFill>
-                  </a:tcPr>
-                </a:tc>
-              </a:tr>
-              <a:tr h="420624">
-                <a:tc>
-                  <a:txBody>
-                    <a:bodyPr/>
-                    <a:lstStyle/>
-                    <a:p>
-                      <a:pPr algn="l"/>
-                      <a:r>
-                        <a:rPr sz="1400">
-                          <a:solidFill>
-                            <a:srgbClr val="C87A00"/>
-                          </a:solidFill>
-                          <a:latin typeface="Calibri"/>
-                        </a:rPr>
-                        <a:t>F2_pow_22bit (smart, 22-bit)</a:t>
-                      </a:r>
-                    </a:p>
-                  </a:txBody>
-                  <a:tcPr>
-                    <a:solidFill>
-                      <a:srgbClr val="FFFFFF"/>
-                    </a:solidFill>
-                  </a:tcPr>
-                </a:tc>
-                <a:tc>
-                  <a:txBody>
-                    <a:bodyPr/>
-                    <a:lstStyle/>
-                    <a:p>
-                      <a:pPr algn="l"/>
-                      <a:r>
-                        <a:rPr sz="1400">
-                          <a:solidFill>
-                            <a:srgbClr val="1F1F1F"/>
-                          </a:solidFill>
-                          <a:latin typeface="Calibri"/>
-                        </a:rPr>
-                        <a:t>95s (80% breach)</a:t>
-                      </a:r>
-                    </a:p>
-                  </a:txBody>
-                  <a:tcPr>
-                    <a:solidFill>
-                      <a:srgbClr val="FFFFFF"/>
-                    </a:solidFill>
-                  </a:tcPr>
-                </a:tc>
-                <a:tc>
-                  <a:txBody>
-                    <a:bodyPr/>
-                    <a:lstStyle/>
-                    <a:p>
-                      <a:pPr algn="l"/>
-                      <a:r>
-                        <a:rPr sz="1400">
-                          <a:solidFill>
-                            <a:srgbClr val="1F1F1F"/>
-                          </a:solidFill>
-                          <a:latin typeface="Calibri"/>
-                        </a:rPr>
-                        <a:t>6x</a:t>
-                      </a:r>
-                    </a:p>
-                  </a:txBody>
-                  <a:tcPr>
-                    <a:solidFill>
-                      <a:srgbClr val="FFFFFF"/>
-                    </a:solidFill>
-                  </a:tcPr>
-                </a:tc>
-              </a:tr>
-              <a:tr h="420624">
-                <a:tc>
-                  <a:txBody>
-                    <a:bodyPr/>
-                    <a:lstStyle/>
-                    <a:p>
-                      <a:pPr algn="l"/>
-                      <a:r>
-                        <a:rPr sz="1400">
-                          <a:solidFill>
-                            <a:srgbClr val="1F1F1F"/>
-                          </a:solidFill>
-                          <a:latin typeface="Calibri"/>
-                        </a:rPr>
-                        <a:t>D2_tarpit_1s</a:t>
-                      </a:r>
-                    </a:p>
-                  </a:txBody>
-                  <a:tcPr>
-                    <a:solidFill>
-                      <a:srgbClr val="F0F4F8"/>
-                    </a:solidFill>
-                  </a:tcPr>
-                </a:tc>
-                <a:tc>
-                  <a:txBody>
-                    <a:bodyPr/>
-                    <a:lstStyle/>
-                    <a:p>
-                      <a:pPr algn="l"/>
-                      <a:r>
-                        <a:rPr sz="1400">
-                          <a:solidFill>
-                            <a:srgbClr val="1F1F1F"/>
-                          </a:solidFill>
-                          <a:latin typeface="Calibri"/>
-                        </a:rPr>
-                        <a:t>112s</a:t>
-                      </a:r>
-                    </a:p>
-                  </a:txBody>
-                  <a:tcPr>
-                    <a:solidFill>
-                      <a:srgbClr val="F0F4F8"/>
-                    </a:solidFill>
-                  </a:tcPr>
-                </a:tc>
-                <a:tc>
-                  <a:txBody>
-                    <a:bodyPr/>
-                    <a:lstStyle/>
-                    <a:p>
-                      <a:pPr algn="l"/>
-                      <a:r>
-                        <a:rPr sz="1400">
-                          <a:solidFill>
-                            <a:srgbClr val="1F1F1F"/>
-                          </a:solidFill>
-                          <a:latin typeface="Calibri"/>
-                        </a:rPr>
-                        <a:t>7x</a:t>
-                      </a:r>
-                    </a:p>
-                  </a:txBody>
-                  <a:tcPr>
-                    <a:solidFill>
-                      <a:srgbClr val="F0F4F8"/>
-                    </a:solidFill>
-                  </a:tcPr>
-                </a:tc>
-              </a:tr>
-              <a:tr h="420624">
-                <a:tc>
-                  <a:txBody>
-                    <a:bodyPr/>
-                    <a:lstStyle/>
-                    <a:p>
-                      <a:pPr algn="l"/>
-                      <a:r>
-                        <a:rPr sz="1400">
-                          <a:solidFill>
-                            <a:srgbClr val="1F1F1F"/>
-                          </a:solidFill>
-                          <a:latin typeface="Calibri"/>
-                        </a:rPr>
-                        <a:t>D3_tarpit_2s</a:t>
-                      </a:r>
-                    </a:p>
-                  </a:txBody>
-                  <a:tcPr>
-                    <a:solidFill>
-                      <a:srgbClr val="FFFFFF"/>
-                    </a:solidFill>
-                  </a:tcPr>
-                </a:tc>
-                <a:tc>
-                  <a:txBody>
-                    <a:bodyPr/>
-                    <a:lstStyle/>
-                    <a:p>
-                      <a:pPr algn="l"/>
-                      <a:r>
-                        <a:rPr sz="1400">
-                          <a:solidFill>
-                            <a:srgbClr val="1F1F1F"/>
-                          </a:solidFill>
-                          <a:latin typeface="Calibri"/>
-                        </a:rPr>
-                        <a:t>214s</a:t>
-                      </a:r>
-                    </a:p>
-                  </a:txBody>
-                  <a:tcPr>
-                    <a:solidFill>
-                      <a:srgbClr val="FFFFFF"/>
-                    </a:solidFill>
-                  </a:tcPr>
-                </a:tc>
-                <a:tc>
-                  <a:txBody>
-                    <a:bodyPr/>
-                    <a:lstStyle/>
-                    <a:p>
-                      <a:pPr algn="l"/>
-                      <a:r>
-                        <a:rPr sz="1400">
-                          <a:solidFill>
-                            <a:srgbClr val="1F1F1F"/>
-                          </a:solidFill>
-                          <a:latin typeface="Calibri"/>
-                        </a:rPr>
-                        <a:t>13x</a:t>
-                      </a:r>
-                    </a:p>
-                  </a:txBody>
-                  <a:tcPr>
-                    <a:solidFill>
-                      <a:srgbClr val="FFFFFF"/>
-                    </a:solidFill>
-                  </a:tcPr>
-                </a:tc>
-              </a:tr>
-            </a:tbl>
-          </a:graphicData>
-        </a:graphic>
-      </p:graphicFrame>
-      <p:sp>
-        <p:nvSpPr>
-          <p:cNvPr id="6" name="TextBox 5"/>
-          <p:cNvSpPr txBox="1"/>
-          <p:nvPr/>
-        </p:nvSpPr>
-        <p:spPr>
-          <a:xfrm>
-            <a:off x="457200" y="5852160"/>
-            <a:ext cx="11277295" cy="548640"/>
-          </a:xfrm>
-          <a:prstGeom prst="rect">
-            <a:avLst/>
-          </a:prstGeom>
-          <a:noFill/>
-        </p:spPr>
-        <p:txBody>
-          <a:bodyPr wrap="square" anchor="t" lIns="0" rIns="0" tIns="0" bIns="0">
-            <a:spAutoFit/>
-          </a:bodyPr>
-          <a:lstStyle/>
-          <a:p>
-            <a:pPr algn="l"/>
-            <a:r>
-              <a:rPr sz="1400" b="0">
-                <a:solidFill>
-                  <a:srgbClr val="6A6A6A"/>
-                </a:solidFill>
-                <a:latin typeface="Calibri"/>
-              </a:rPr>
-              <a:t>Tarpit slowdown is linear in wordlist depth x per-failure delay - predictable, tunable.</a:t>
-            </a:r>
-          </a:p>
-        </p:txBody>
-      </p:sp>
-    </p:spTree>
-  </p:cSld>
-  <p:clrMapOvr>
-    <a:masterClrMapping/>
-  </p:clrMapOvr>
-</p:sld>
-</file>
-
-<file path=ppt/slides/slide15.xml><?xml version="1.0" encoding="utf-8"?>
-<p:sld xmlns:a="http://schemas.openxmlformats.org/drawingml/2006/main" xmlns:p="http://schemas.openxmlformats.org/presentationml/2006/main" xmlns:r="http://schemas.openxmlformats.org/officeDocument/2006/relationships">
-  <p:cSld>
-    <p:spTree>
-      <p:nvGrpSpPr>
-        <p:cNvPr id="1" name=""/>
-        <p:cNvGrpSpPr/>
-        <p:nvPr/>
-      </p:nvGrpSpPr>
-      <p:grpSpPr/>
-      <p:sp>
-        <p:nvSpPr>
-          <p:cNvPr id="2" name="Rectangle 1"/>
-          <p:cNvSpPr/>
-          <p:nvPr/>
-        </p:nvSpPr>
-        <p:spPr>
-          <a:xfrm>
-            <a:off x="0" y="0"/>
-            <a:ext cx="12191695" cy="91440"/>
-          </a:xfrm>
-          <a:prstGeom prst="rect">
-            <a:avLst/>
-          </a:prstGeom>
-          <a:solidFill>
-            <a:srgbClr val="1A3B5C"/>
-          </a:solidFill>
-          <a:ln>
-            <a:noFill/>
-          </a:ln>
-        </p:spPr>
-        <p:style>
-          <a:lnRef idx="1">
-            <a:schemeClr val="accent1"/>
-          </a:lnRef>
-          <a:fillRef idx="3">
-            <a:schemeClr val="accent1"/>
-          </a:fillRef>
-          <a:effectRef idx="2">
-            <a:schemeClr val="accent1"/>
-          </a:effectRef>
-          <a:fontRef idx="minor">
-            <a:schemeClr val="lt1"/>
-          </a:fontRef>
-        </p:style>
-        <p:txBody>
-          <a:bodyPr rtlCol="0" anchor="ctr"/>
-          <a:lstStyle/>
-          <a:p>
-            <a:pPr algn="ctr"/>
-          </a:p>
-        </p:txBody>
-      </p:sp>
-      <p:sp>
-        <p:nvSpPr>
-          <p:cNvPr id="3" name="TextBox 2"/>
-          <p:cNvSpPr txBox="1"/>
-          <p:nvPr/>
-        </p:nvSpPr>
-        <p:spPr>
-          <a:xfrm>
-            <a:off x="457200" y="228600"/>
-            <a:ext cx="11277295" cy="640080"/>
-          </a:xfrm>
-          <a:prstGeom prst="rect">
-            <a:avLst/>
-          </a:prstGeom>
-          <a:noFill/>
-        </p:spPr>
-        <p:txBody>
-          <a:bodyPr wrap="square" anchor="t" lIns="0" rIns="0" tIns="0" bIns="0">
-            <a:spAutoFit/>
-          </a:bodyPr>
-          <a:lstStyle/>
-          <a:p>
-            <a:pPr algn="l"/>
-            <a:r>
-              <a:rPr sz="3000" b="1">
-                <a:solidFill>
-                  <a:srgbClr val="1A3B5C"/>
-                </a:solidFill>
-                <a:latin typeface="Calibri"/>
-              </a:rPr>
-              <a:t>Finding 1: scrypt was barely a defense</a:t>
-            </a:r>
-          </a:p>
-        </p:txBody>
-      </p:sp>
-      <p:sp>
-        <p:nvSpPr>
-          <p:cNvPr id="4" name="TextBox 3"/>
-          <p:cNvSpPr txBox="1"/>
-          <p:nvPr/>
-        </p:nvSpPr>
-        <p:spPr>
-          <a:xfrm>
-            <a:off x="457200" y="868680"/>
-            <a:ext cx="11277295" cy="365760"/>
-          </a:xfrm>
-          <a:prstGeom prst="rect">
-            <a:avLst/>
-          </a:prstGeom>
-          <a:noFill/>
-        </p:spPr>
-        <p:txBody>
-          <a:bodyPr wrap="square" anchor="t" lIns="0" rIns="0" tIns="0" bIns="0">
-            <a:spAutoFit/>
-          </a:bodyPr>
-          <a:lstStyle/>
-          <a:p>
-            <a:pPr algn="l"/>
-            <a:r>
-              <a:rPr sz="1600" b="0">
-                <a:solidFill>
-                  <a:srgbClr val="6A6A6A"/>
-                </a:solidFill>
-                <a:latin typeface="Calibri"/>
-              </a:rPr>
-              <a:t>Default werkzeug scrypt:32768:8:1 finished faster than baseline</a:t>
-            </a:r>
-          </a:p>
-        </p:txBody>
-      </p:sp>
-      <p:sp>
-        <p:nvSpPr>
-          <p:cNvPr id="5" name="TextBox 4"/>
-          <p:cNvSpPr txBox="1"/>
-          <p:nvPr/>
-        </p:nvSpPr>
-        <p:spPr>
-          <a:xfrm>
-            <a:off x="548640" y="1554480"/>
-            <a:ext cx="11094415" cy="2286000"/>
-          </a:xfrm>
-          <a:prstGeom prst="rect">
-            <a:avLst/>
-          </a:prstGeom>
-          <a:noFill/>
-        </p:spPr>
-        <p:txBody>
-          <a:bodyPr wrap="square" lIns="0" rIns="0">
-            <a:spAutoFit/>
-          </a:bodyPr>
-          <a:lstStyle/>
-          <a:p>
-            <a:pPr algn="l">
-              <a:lnSpc>
-                <a:spcPct val="115000"/>
-              </a:lnSpc>
-            </a:pPr>
-            <a:r>
-              <a:rPr sz="1800" b="1">
-                <a:solidFill>
-                  <a:srgbClr val="1A3B5C"/>
-                </a:solidFill>
-                <a:latin typeface="Calibri"/>
-              </a:rPr>
-              <a:t>• </a:t>
-            </a:r>
-            <a:r>
-              <a:rPr sz="1800">
-                <a:solidFill>
-                  <a:srgbClr val="1F1F1F"/>
-                </a:solidFill>
-                <a:latin typeface="Calibri"/>
-              </a:rPr>
-              <a:t>scrypt:32768:8:1 - 12s (vs 16s baseline). Lost in HTTP roundtrip noise.</a:t>
-            </a:r>
-          </a:p>
-          <a:p>
-            <a:pPr algn="l">
-              <a:lnSpc>
-                <a:spcPct val="115000"/>
-              </a:lnSpc>
-            </a:pPr>
-            <a:r>
-              <a:rPr sz="1800" b="1">
-                <a:solidFill>
-                  <a:srgbClr val="1A3B5C"/>
-                </a:solidFill>
-                <a:latin typeface="Calibri"/>
-              </a:rPr>
-              <a:t>• </a:t>
-            </a:r>
-            <a:r>
-              <a:rPr sz="1800">
-                <a:solidFill>
-                  <a:srgbClr val="1F1F1F"/>
-                </a:solidFill>
-                <a:latin typeface="Calibri"/>
-              </a:rPr>
-              <a:t>Server-side scrypt cost dominated by n=32768 (~16ms on test hardware).</a:t>
-            </a:r>
-          </a:p>
-          <a:p>
-            <a:pPr algn="l">
-              <a:lnSpc>
-                <a:spcPct val="115000"/>
-              </a:lnSpc>
-            </a:pPr>
-            <a:r>
-              <a:rPr sz="1800" b="1">
-                <a:solidFill>
-                  <a:srgbClr val="1A3B5C"/>
-                </a:solidFill>
-                <a:latin typeface="Calibri"/>
-              </a:rPr>
-              <a:t>• </a:t>
-            </a:r>
-            <a:r>
-              <a:rPr sz="1800">
-                <a:solidFill>
-                  <a:srgbClr val="1F1F1F"/>
-                </a:solidFill>
-                <a:latin typeface="Calibri"/>
-              </a:rPr>
-              <a:t>pbkdf2:sha256:600000 was meaningfully slower (23s, 1.5x baseline).</a:t>
-            </a:r>
-          </a:p>
-        </p:txBody>
-      </p:sp>
-      <p:sp>
-        <p:nvSpPr>
-          <p:cNvPr id="6" name="Rectangle 5"/>
-          <p:cNvSpPr/>
-          <p:nvPr/>
-        </p:nvSpPr>
-        <p:spPr>
-          <a:xfrm>
-            <a:off x="548640" y="4114800"/>
-            <a:ext cx="11094415" cy="54864"/>
-          </a:xfrm>
-          <a:prstGeom prst="rect">
-            <a:avLst/>
-          </a:prstGeom>
-          <a:solidFill>
-            <a:srgbClr val="D33636"/>
-          </a:solidFill>
-          <a:ln>
-            <a:noFill/>
-          </a:ln>
-        </p:spPr>
-        <p:style>
-          <a:lnRef idx="1">
-            <a:schemeClr val="accent1"/>
-          </a:lnRef>
-          <a:fillRef idx="3">
-            <a:schemeClr val="accent1"/>
-          </a:fillRef>
-          <a:effectRef idx="2">
-            <a:schemeClr val="accent1"/>
-          </a:effectRef>
-          <a:fontRef idx="minor">
-            <a:schemeClr val="lt1"/>
-          </a:fontRef>
-        </p:style>
-        <p:txBody>
-          <a:bodyPr rtlCol="0" anchor="ctr"/>
-          <a:lstStyle/>
-          <a:p>
-            <a:pPr algn="ctr"/>
-          </a:p>
-        </p:txBody>
-      </p:sp>
-      <p:sp>
-        <p:nvSpPr>
-          <p:cNvPr id="7" name="TextBox 6"/>
-          <p:cNvSpPr txBox="1"/>
-          <p:nvPr/>
-        </p:nvSpPr>
-        <p:spPr>
-          <a:xfrm>
-            <a:off x="548640" y="4297680"/>
-            <a:ext cx="11094415" cy="1828800"/>
-          </a:xfrm>
-          <a:prstGeom prst="rect">
-            <a:avLst/>
-          </a:prstGeom>
-          <a:noFill/>
-        </p:spPr>
-        <p:txBody>
-          <a:bodyPr wrap="square" anchor="t" lIns="0" rIns="0" tIns="0" bIns="0">
-            <a:spAutoFit/>
-          </a:bodyPr>
-          <a:lstStyle/>
-          <a:p>
-            <a:pPr algn="l"/>
-            <a:r>
-              <a:rPr sz="1800" b="1">
-                <a:solidFill>
-                  <a:srgbClr val="D33636"/>
-                </a:solidFill>
-                <a:latin typeface="Calibri"/>
-              </a:rPr>
-              <a:t>Lesson: "we use a slow hash" is not a defense unless parameters are tuned for the target hardware. Production deployments should benchmark and aim for ~100 ms per verify. Don't trust library defaults.</a:t>
+              <a:t>Tarpit and slow-hash slowdowns are linear in wordlist depth - predictable and tunable. (Next slide.)</a:t>
             </a:r>
           </a:p>
         </p:txBody>
@@ -6381,7 +6985,7 @@
                 </a:solidFill>
                 <a:latin typeface="Calibri"/>
               </a:rPr>
-              <a:t>Finding 2: PoW has a sharp probabilistic cliff</a:t>
+              <a:t>Finding 1: scrypt was barely a defense</a:t>
             </a:r>
           </a:p>
         </p:txBody>
@@ -6416,7 +7020,314 @@
                 </a:solidFill>
                 <a:latin typeface="Calibri"/>
               </a:rPr>
-              <a:t>Past a difficulty threshold, PoW shifts from slow-down to actual stop</a:t>
+              <a:t>Default werkzeug scrypt:32768:8:1 was statistically indistinguishable from baseline</a:t>
+            </a:r>
+          </a:p>
+        </p:txBody>
+      </p:sp>
+      <p:sp>
+        <p:nvSpPr>
+          <p:cNvPr id="5" name="TextBox 4"/>
+          <p:cNvSpPr txBox="1"/>
+          <p:nvPr/>
+        </p:nvSpPr>
+        <p:spPr>
+          <a:xfrm>
+            <a:off x="548640" y="1554480"/>
+            <a:ext cx="11094415" cy="2286000"/>
+          </a:xfrm>
+          <a:prstGeom prst="rect">
+            <a:avLst/>
+          </a:prstGeom>
+          <a:noFill/>
+        </p:spPr>
+        <p:txBody>
+          <a:bodyPr wrap="square" lIns="0" rIns="0">
+            <a:spAutoFit/>
+          </a:bodyPr>
+          <a:lstStyle/>
+          <a:p>
+            <a:pPr algn="l">
+              <a:lnSpc>
+                <a:spcPct val="115000"/>
+              </a:lnSpc>
+            </a:pPr>
+            <a:r>
+              <a:rPr sz="1800" b="1">
+                <a:solidFill>
+                  <a:srgbClr val="1A3B5C"/>
+                </a:solidFill>
+                <a:latin typeface="Calibri"/>
+              </a:rPr>
+              <a:t>• </a:t>
+            </a:r>
+            <a:r>
+              <a:rPr sz="1800">
+                <a:solidFill>
+                  <a:srgbClr val="1F1F1F"/>
+                </a:solidFill>
+                <a:latin typeface="Calibri"/>
+              </a:rPr>
+              <a:t>scrypt:32768:8:1 - 14.40s (vs 14.46s baseline). Lost in HTTP roundtrip noise.</a:t>
+            </a:r>
+          </a:p>
+          <a:p>
+            <a:pPr algn="l">
+              <a:lnSpc>
+                <a:spcPct val="115000"/>
+              </a:lnSpc>
+            </a:pPr>
+            <a:r>
+              <a:rPr sz="1800" b="1">
+                <a:solidFill>
+                  <a:srgbClr val="1A3B5C"/>
+                </a:solidFill>
+                <a:latin typeface="Calibri"/>
+              </a:rPr>
+              <a:t>• </a:t>
+            </a:r>
+            <a:r>
+              <a:rPr sz="1800">
+                <a:solidFill>
+                  <a:srgbClr val="1F1F1F"/>
+                </a:solidFill>
+                <a:latin typeface="Calibri"/>
+              </a:rPr>
+              <a:t>Server-side scrypt cost dominated by n=32768 (~16ms on test hardware).</a:t>
+            </a:r>
+          </a:p>
+          <a:p>
+            <a:pPr algn="l">
+              <a:lnSpc>
+                <a:spcPct val="115000"/>
+              </a:lnSpc>
+            </a:pPr>
+            <a:r>
+              <a:rPr sz="1800" b="1">
+                <a:solidFill>
+                  <a:srgbClr val="1A3B5C"/>
+                </a:solidFill>
+                <a:latin typeface="Calibri"/>
+              </a:rPr>
+              <a:t>• </a:t>
+            </a:r>
+            <a:r>
+              <a:rPr sz="1800">
+                <a:solidFill>
+                  <a:srgbClr val="1F1F1F"/>
+                </a:solidFill>
+                <a:latin typeface="Calibri"/>
+              </a:rPr>
+              <a:t>pbkdf2:sha256:600000 was meaningfully slower (83.5s, 5.8x baseline).</a:t>
+            </a:r>
+          </a:p>
+        </p:txBody>
+      </p:sp>
+      <p:sp>
+        <p:nvSpPr>
+          <p:cNvPr id="6" name="Rectangle 5"/>
+          <p:cNvSpPr/>
+          <p:nvPr/>
+        </p:nvSpPr>
+        <p:spPr>
+          <a:xfrm>
+            <a:off x="548640" y="4114800"/>
+            <a:ext cx="11094415" cy="54864"/>
+          </a:xfrm>
+          <a:prstGeom prst="rect">
+            <a:avLst/>
+          </a:prstGeom>
+          <a:solidFill>
+            <a:srgbClr val="D33636"/>
+          </a:solidFill>
+          <a:ln>
+            <a:noFill/>
+          </a:ln>
+        </p:spPr>
+        <p:style>
+          <a:lnRef idx="1">
+            <a:schemeClr val="accent1"/>
+          </a:lnRef>
+          <a:fillRef idx="3">
+            <a:schemeClr val="accent1"/>
+          </a:fillRef>
+          <a:effectRef idx="2">
+            <a:schemeClr val="accent1"/>
+          </a:effectRef>
+          <a:fontRef idx="minor">
+            <a:schemeClr val="lt1"/>
+          </a:fontRef>
+        </p:style>
+        <p:txBody>
+          <a:bodyPr rtlCol="0" anchor="ctr"/>
+          <a:lstStyle/>
+          <a:p>
+            <a:pPr algn="ctr"/>
+          </a:p>
+        </p:txBody>
+      </p:sp>
+      <p:sp>
+        <p:nvSpPr>
+          <p:cNvPr id="7" name="TextBox 6"/>
+          <p:cNvSpPr txBox="1"/>
+          <p:nvPr/>
+        </p:nvSpPr>
+        <p:spPr>
+          <a:xfrm>
+            <a:off x="548640" y="4297680"/>
+            <a:ext cx="11094415" cy="1828800"/>
+          </a:xfrm>
+          <a:prstGeom prst="rect">
+            <a:avLst/>
+          </a:prstGeom>
+          <a:noFill/>
+        </p:spPr>
+        <p:txBody>
+          <a:bodyPr wrap="square" anchor="t" lIns="0" rIns="0" tIns="0" bIns="0">
+            <a:spAutoFit/>
+          </a:bodyPr>
+          <a:lstStyle/>
+          <a:p>
+            <a:pPr algn="l"/>
+            <a:r>
+              <a:rPr sz="1800" b="1">
+                <a:solidFill>
+                  <a:srgbClr val="D33636"/>
+                </a:solidFill>
+                <a:latin typeface="Calibri"/>
+              </a:rPr>
+              <a:t>Lesson: "we use a slow hash" is not a defense unless parameters are tuned for the target hardware. Production deployments should benchmark and aim for ~100 ms per verify. Don't trust library defaults.</a:t>
+            </a:r>
+          </a:p>
+        </p:txBody>
+      </p:sp>
+    </p:spTree>
+  </p:cSld>
+  <p:clrMapOvr>
+    <a:masterClrMapping/>
+  </p:clrMapOvr>
+</p:sld>
+</file>
+
+<file path=ppt/slides/slide17.xml><?xml version="1.0" encoding="utf-8"?>
+<p:sld xmlns:a="http://schemas.openxmlformats.org/drawingml/2006/main" xmlns:p="http://schemas.openxmlformats.org/presentationml/2006/main" xmlns:r="http://schemas.openxmlformats.org/officeDocument/2006/relationships">
+  <p:cSld>
+    <p:spTree>
+      <p:nvGrpSpPr>
+        <p:cNvPr id="1" name=""/>
+        <p:cNvGrpSpPr/>
+        <p:nvPr/>
+      </p:nvGrpSpPr>
+      <p:grpSpPr/>
+      <p:sp>
+        <p:nvSpPr>
+          <p:cNvPr id="2" name="Rectangle 1"/>
+          <p:cNvSpPr/>
+          <p:nvPr/>
+        </p:nvSpPr>
+        <p:spPr>
+          <a:xfrm>
+            <a:off x="0" y="0"/>
+            <a:ext cx="12191695" cy="91440"/>
+          </a:xfrm>
+          <a:prstGeom prst="rect">
+            <a:avLst/>
+          </a:prstGeom>
+          <a:solidFill>
+            <a:srgbClr val="1A3B5C"/>
+          </a:solidFill>
+          <a:ln>
+            <a:noFill/>
+          </a:ln>
+        </p:spPr>
+        <p:style>
+          <a:lnRef idx="1">
+            <a:schemeClr val="accent1"/>
+          </a:lnRef>
+          <a:fillRef idx="3">
+            <a:schemeClr val="accent1"/>
+          </a:fillRef>
+          <a:effectRef idx="2">
+            <a:schemeClr val="accent1"/>
+          </a:effectRef>
+          <a:fontRef idx="minor">
+            <a:schemeClr val="lt1"/>
+          </a:fontRef>
+        </p:style>
+        <p:txBody>
+          <a:bodyPr rtlCol="0" anchor="ctr"/>
+          <a:lstStyle/>
+          <a:p>
+            <a:pPr algn="ctr"/>
+          </a:p>
+        </p:txBody>
+      </p:sp>
+      <p:sp>
+        <p:nvSpPr>
+          <p:cNvPr id="3" name="TextBox 2"/>
+          <p:cNvSpPr txBox="1"/>
+          <p:nvPr/>
+        </p:nvSpPr>
+        <p:spPr>
+          <a:xfrm>
+            <a:off x="457200" y="228600"/>
+            <a:ext cx="11277295" cy="640080"/>
+          </a:xfrm>
+          <a:prstGeom prst="rect">
+            <a:avLst/>
+          </a:prstGeom>
+          <a:noFill/>
+        </p:spPr>
+        <p:txBody>
+          <a:bodyPr wrap="square" anchor="t" lIns="0" rIns="0" tIns="0" bIns="0">
+            <a:spAutoFit/>
+          </a:bodyPr>
+          <a:lstStyle/>
+          <a:p>
+            <a:pPr algn="l"/>
+            <a:r>
+              <a:rPr sz="3000" b="1">
+                <a:solidFill>
+                  <a:srgbClr val="1A3B5C"/>
+                </a:solidFill>
+                <a:latin typeface="Calibri"/>
+              </a:rPr>
+              <a:t>Finding 2: PoW sits on a probabilistic cliff</a:t>
+            </a:r>
+          </a:p>
+        </p:txBody>
+      </p:sp>
+      <p:sp>
+        <p:nvSpPr>
+          <p:cNvPr id="4" name="TextBox 3"/>
+          <p:cNvSpPr txBox="1"/>
+          <p:nvPr/>
+        </p:nvSpPr>
+        <p:spPr>
+          <a:xfrm>
+            <a:off x="457200" y="868680"/>
+            <a:ext cx="11277295" cy="365760"/>
+          </a:xfrm>
+          <a:prstGeom prst="rect">
+            <a:avLst/>
+          </a:prstGeom>
+          <a:noFill/>
+        </p:spPr>
+        <p:txBody>
+          <a:bodyPr wrap="square" anchor="t" lIns="0" rIns="0" tIns="0" bIns="0">
+            <a:spAutoFit/>
+          </a:bodyPr>
+          <a:lstStyle/>
+          <a:p>
+            <a:pPr algn="l"/>
+            <a:r>
+              <a:rPr sz="1600" b="0">
+                <a:solidFill>
+                  <a:srgbClr val="6A6A6A"/>
+                </a:solidFill>
+                <a:latin typeface="Calibri"/>
+              </a:rPr>
+              <a:t>Past a difficulty threshold, PoW shifts from slow-down to probabilistic block</a:t>
             </a:r>
           </a:p>
         </p:txBody>
@@ -6505,7 +7416,7 @@
                           </a:solidFill>
                           <a:latin typeface="Calibri"/>
                         </a:rPr>
-                        <a:t>Breach rate</a:t>
+                        <a:t>Breach rate (50 trials)</a:t>
                       </a:r>
                     </a:p>
                   </a:txBody>
@@ -6622,7 +7533,7 @@
                           </a:solidFill>
                           <a:latin typeface="Calibri"/>
                         </a:rPr>
-                        <a:t>14s</a:t>
+                        <a:t>34.4s</a:t>
                       </a:r>
                     </a:p>
                   </a:txBody>
@@ -6693,7 +7604,7 @@
                           </a:solidFill>
                           <a:latin typeface="Calibri"/>
                         </a:rPr>
-                        <a:t>80%</a:t>
+                        <a:t>82%</a:t>
                       </a:r>
                     </a:p>
                   </a:txBody>
@@ -6716,7 +7627,7 @@
                           </a:solidFill>
                           <a:latin typeface="Calibri"/>
                         </a:rPr>
-                        <a:t>95s</a:t>
+                        <a:t>305.9s</a:t>
                       </a:r>
                     </a:p>
                   </a:txBody>
@@ -6740,7 +7651,7 @@
         <p:spPr>
           <a:xfrm>
             <a:off x="548640" y="3657600"/>
-            <a:ext cx="11094415" cy="2286000"/>
+            <a:ext cx="11094415" cy="2560320"/>
           </a:xfrm>
           <a:prstGeom prst="rect">
             <a:avLst/>
@@ -6759,7 +7670,7 @@
               </a:lnSpc>
             </a:pPr>
             <a:r>
-              <a:rPr sz="1700" b="1">
+              <a:rPr sz="1600" b="1">
                 <a:solidFill>
                   <a:srgbClr val="1A3B5C"/>
                 </a:solidFill>
@@ -6768,13 +7679,13 @@
               <a:t>• </a:t>
             </a:r>
             <a:r>
-              <a:rPr sz="1700">
+              <a:rPr sz="1600">
                 <a:solidFill>
                   <a:srgbClr val="1F1F1F"/>
                 </a:solidFill>
                 <a:latin typeface="Calibri"/>
               </a:rPr>
-              <a:t>At 22-bit difficulty the attacker's solver hits its 5M-attempt budget often enough that one trial in five times out.</a:t>
+              <a:t>At 22-bit difficulty the attacker's 5M-attempt-per-puzzle budget runs out on roughly 1 in 5 trials.</a:t>
             </a:r>
           </a:p>
           <a:p>
@@ -6784,7 +7695,7 @@
               </a:lnSpc>
             </a:pPr>
             <a:r>
-              <a:rPr sz="1700" b="1">
+              <a:rPr sz="1600" b="1">
                 <a:solidFill>
                   <a:srgbClr val="1A3B5C"/>
                 </a:solidFill>
@@ -6793,7 +7704,7 @@
               <a:t>• </a:t>
             </a:r>
             <a:r>
-              <a:rPr sz="1700">
+              <a:rPr sz="1600">
                 <a:solidFill>
                   <a:srgbClr val="1F1F1F"/>
                 </a:solidFill>
@@ -6809,7 +7720,7 @@
               </a:lnSpc>
             </a:pPr>
             <a:r>
-              <a:rPr sz="1700" b="1">
+              <a:rPr sz="1600" b="1">
                 <a:solidFill>
                   <a:srgbClr val="1A3B5C"/>
                 </a:solidFill>
@@ -6818,13 +7729,38 @@
               <a:t>• </a:t>
             </a:r>
             <a:r>
-              <a:rPr sz="1700">
+              <a:rPr sz="1600">
                 <a:solidFill>
                   <a:srgbClr val="1F1F1F"/>
                 </a:solidFill>
                 <a:latin typeface="Calibri"/>
               </a:rPr>
-              <a:t>Real configuration sweet spot - but the line depends on attacker hardware.</a:t>
+              <a:t>At 200-word the same config breached 30/33 (91%) - more depth means more puzzles, but the solver kept squeaking through.</a:t>
+            </a:r>
+          </a:p>
+          <a:p>
+            <a:pPr algn="l">
+              <a:lnSpc>
+                <a:spcPct val="115000"/>
+              </a:lnSpc>
+            </a:pPr>
+            <a:r>
+              <a:rPr sz="1600" b="1">
+                <a:solidFill>
+                  <a:srgbClr val="1A3B5C"/>
+                </a:solidFill>
+                <a:latin typeface="Calibri"/>
+              </a:rPr>
+              <a:t>• </a:t>
+            </a:r>
+            <a:r>
+              <a:rPr sz="1600">
+                <a:solidFill>
+                  <a:srgbClr val="1F1F1F"/>
+                </a:solidFill>
+                <a:latin typeface="Calibri"/>
+              </a:rPr>
+              <a:t>Cliff is a function of solver-budget per puzzle, not just difficulty bits.</a:t>
             </a:r>
           </a:p>
         </p:txBody>
@@ -6837,7 +7773,7 @@
 </p:sld>
 </file>
 
-<file path=ppt/slides/slide17.xml><?xml version="1.0" encoding="utf-8"?>
+<file path=ppt/slides/slide18.xml><?xml version="1.0" encoding="utf-8"?>
 <p:sld xmlns:a="http://schemas.openxmlformats.org/drawingml/2006/main" xmlns:p="http://schemas.openxmlformats.org/presentationml/2006/main" xmlns:r="http://schemas.openxmlformats.org/officeDocument/2006/relationships">
   <p:cSld>
     <p:spTree>
@@ -6920,7 +7856,7 @@
                 </a:solidFill>
                 <a:latin typeface="Calibri"/>
               </a:rPr>
-              <a:t>Layered defense converges</a:t>
+              <a:t>Finding 3: time scales linearly with wordlist depth</a:t>
             </a:r>
           </a:p>
         </p:txBody>
@@ -6955,7 +7891,1156 @@
                 </a:solidFill>
                 <a:latin typeface="Calibri"/>
               </a:rPr>
-              <a:t>Once the cheap defense fires, the rest never get a chance</a:t>
+              <a:t>Each line's slope is the per-attempt cost the defense imposes</a:t>
+            </a:r>
+          </a:p>
+        </p:txBody>
+      </p:sp>
+      <p:pic>
+        <p:nvPicPr>
+          <p:cNvPr id="5" name="Picture 4" descr="chart_wordlist_scaling.png"/>
+          <p:cNvPicPr>
+            <a:picLocks noChangeAspect="1"/>
+          </p:cNvPicPr>
+          <p:nvPr/>
+        </p:nvPicPr>
+        <p:blipFill>
+          <a:blip r:embed="rId2"/>
+          <a:stretch>
+            <a:fillRect/>
+          </a:stretch>
+        </p:blipFill>
+        <p:spPr>
+          <a:xfrm>
+            <a:off x="365760" y="1463040"/>
+            <a:ext cx="7863840" cy="4572000"/>
+          </a:xfrm>
+          <a:prstGeom prst="rect">
+            <a:avLst/>
+          </a:prstGeom>
+        </p:spPr>
+      </p:pic>
+      <p:sp>
+        <p:nvSpPr>
+          <p:cNvPr id="6" name="TextBox 5"/>
+          <p:cNvSpPr txBox="1"/>
+          <p:nvPr/>
+        </p:nvSpPr>
+        <p:spPr>
+          <a:xfrm>
+            <a:off x="8412480" y="1645920"/>
+            <a:ext cx="3657600" cy="457200"/>
+          </a:xfrm>
+          <a:prstGeom prst="rect">
+            <a:avLst/>
+          </a:prstGeom>
+          <a:noFill/>
+        </p:spPr>
+        <p:txBody>
+          <a:bodyPr wrap="square" anchor="t" lIns="0" rIns="0" tIns="0" bIns="0">
+            <a:spAutoFit/>
+          </a:bodyPr>
+          <a:lstStyle/>
+          <a:p>
+            <a:pPr algn="l"/>
+            <a:r>
+              <a:rPr sz="1800" b="1">
+                <a:solidFill>
+                  <a:srgbClr val="1A3B5C"/>
+                </a:solidFill>
+                <a:latin typeface="Calibri"/>
+              </a:rPr>
+              <a:t>Per-attempt cost</a:t>
+            </a:r>
+          </a:p>
+        </p:txBody>
+      </p:sp>
+      <p:sp>
+        <p:nvSpPr>
+          <p:cNvPr id="7" name="TextBox 6"/>
+          <p:cNvSpPr txBox="1"/>
+          <p:nvPr/>
+        </p:nvSpPr>
+        <p:spPr>
+          <a:xfrm>
+            <a:off x="8412480" y="2194560"/>
+            <a:ext cx="3657600" cy="4114800"/>
+          </a:xfrm>
+          <a:prstGeom prst="rect">
+            <a:avLst/>
+          </a:prstGeom>
+          <a:noFill/>
+        </p:spPr>
+        <p:txBody>
+          <a:bodyPr wrap="square" lIns="0" rIns="0">
+            <a:spAutoFit/>
+          </a:bodyPr>
+          <a:lstStyle/>
+          <a:p>
+            <a:pPr algn="l">
+              <a:lnSpc>
+                <a:spcPct val="115000"/>
+              </a:lnSpc>
+            </a:pPr>
+            <a:r>
+              <a:rPr sz="1300" b="1">
+                <a:solidFill>
+                  <a:srgbClr val="1A3B5C"/>
+                </a:solidFill>
+                <a:latin typeface="Calibri"/>
+              </a:rPr>
+              <a:t>• </a:t>
+            </a:r>
+            <a:r>
+              <a:rPr sz="1300">
+                <a:solidFill>
+                  <a:srgbClr val="1F1F1F"/>
+                </a:solidFill>
+                <a:latin typeface="Calibri"/>
+              </a:rPr>
+              <a:t>D3_tarpit_2s: ~2.0 s / attempt</a:t>
+            </a:r>
+          </a:p>
+          <a:p>
+            <a:pPr algn="l">
+              <a:lnSpc>
+                <a:spcPct val="115000"/>
+              </a:lnSpc>
+            </a:pPr>
+            <a:r>
+              <a:rPr sz="1300" b="1">
+                <a:solidFill>
+                  <a:srgbClr val="1A3B5C"/>
+                </a:solidFill>
+                <a:latin typeface="Calibri"/>
+              </a:rPr>
+              <a:t>• </a:t>
+            </a:r>
+            <a:r>
+              <a:rPr sz="1300">
+                <a:solidFill>
+                  <a:srgbClr val="1F1F1F"/>
+                </a:solidFill>
+                <a:latin typeface="Calibri"/>
+              </a:rPr>
+              <a:t>D2_tarpit_1s: ~1.0 s / attempt</a:t>
+            </a:r>
+          </a:p>
+          <a:p>
+            <a:pPr algn="l">
+              <a:lnSpc>
+                <a:spcPct val="115000"/>
+              </a:lnSpc>
+            </a:pPr>
+            <a:r>
+              <a:rPr sz="1300" b="1">
+                <a:solidFill>
+                  <a:srgbClr val="1A3B5C"/>
+                </a:solidFill>
+                <a:latin typeface="Calibri"/>
+              </a:rPr>
+              <a:t>• </a:t>
+            </a:r>
+            <a:r>
+              <a:rPr sz="1300">
+                <a:solidFill>
+                  <a:srgbClr val="1F1F1F"/>
+                </a:solidFill>
+                <a:latin typeface="Calibri"/>
+              </a:rPr>
+              <a:t>K_slow_hash_pbkdf2: ~0.83 s / attempt</a:t>
+            </a:r>
+          </a:p>
+          <a:p>
+            <a:pPr algn="l">
+              <a:lnSpc>
+                <a:spcPct val="115000"/>
+              </a:lnSpc>
+            </a:pPr>
+            <a:r>
+              <a:rPr sz="1300" b="1">
+                <a:solidFill>
+                  <a:srgbClr val="1A3B5C"/>
+                </a:solidFill>
+                <a:latin typeface="Calibri"/>
+              </a:rPr>
+              <a:t>• </a:t>
+            </a:r>
+            <a:r>
+              <a:rPr sz="1300">
+                <a:solidFill>
+                  <a:srgbClr val="1F1F1F"/>
+                </a:solidFill>
+                <a:latin typeface="Calibri"/>
+              </a:rPr>
+              <a:t>D_tarpit_500ms: ~0.5 s / attempt</a:t>
+            </a:r>
+          </a:p>
+          <a:p>
+            <a:pPr algn="l">
+              <a:lnSpc>
+                <a:spcPct val="115000"/>
+              </a:lnSpc>
+            </a:pPr>
+            <a:r>
+              <a:rPr sz="1300" b="1">
+                <a:solidFill>
+                  <a:srgbClr val="1A3B5C"/>
+                </a:solidFill>
+                <a:latin typeface="Calibri"/>
+              </a:rPr>
+              <a:t>• </a:t>
+            </a:r>
+            <a:r>
+              <a:rPr sz="1300">
+                <a:solidFill>
+                  <a:srgbClr val="1F1F1F"/>
+                </a:solidFill>
+                <a:latin typeface="Calibri"/>
+              </a:rPr>
+              <a:t>F_pow_smart_attacker: ~0.4 s / attempt</a:t>
+            </a:r>
+          </a:p>
+          <a:p>
+            <a:pPr algn="l">
+              <a:lnSpc>
+                <a:spcPct val="115000"/>
+              </a:lnSpc>
+            </a:pPr>
+            <a:r>
+              <a:rPr sz="1300" b="1">
+                <a:solidFill>
+                  <a:srgbClr val="1A3B5C"/>
+                </a:solidFill>
+                <a:latin typeface="Calibri"/>
+              </a:rPr>
+              <a:t>• </a:t>
+            </a:r>
+            <a:r>
+              <a:rPr sz="1300">
+                <a:solidFill>
+                  <a:srgbClr val="1F1F1F"/>
+                </a:solidFill>
+                <a:latin typeface="Calibri"/>
+              </a:rPr>
+              <a:t>A_baseline / K2_scrypt: overlap - scrypt added zero observable cost</a:t>
+            </a:r>
+          </a:p>
+        </p:txBody>
+      </p:sp>
+      <p:sp>
+        <p:nvSpPr>
+          <p:cNvPr id="8" name="TextBox 7"/>
+          <p:cNvSpPr txBox="1"/>
+          <p:nvPr/>
+        </p:nvSpPr>
+        <p:spPr>
+          <a:xfrm>
+            <a:off x="8412480" y="5486400"/>
+            <a:ext cx="3657600" cy="914400"/>
+          </a:xfrm>
+          <a:prstGeom prst="rect">
+            <a:avLst/>
+          </a:prstGeom>
+          <a:noFill/>
+        </p:spPr>
+        <p:txBody>
+          <a:bodyPr wrap="square" anchor="t" lIns="0" rIns="0" tIns="0" bIns="0">
+            <a:spAutoFit/>
+          </a:bodyPr>
+          <a:lstStyle/>
+          <a:p>
+            <a:pPr algn="l"/>
+            <a:r>
+              <a:rPr sz="1400" b="0">
+                <a:solidFill>
+                  <a:srgbClr val="6A6A6A"/>
+                </a:solidFill>
+                <a:latin typeface="Calibri"/>
+              </a:rPr>
+              <a:t>Buying time per attempt: budget = cost x depth.</a:t>
+            </a:r>
+          </a:p>
+        </p:txBody>
+      </p:sp>
+    </p:spTree>
+  </p:cSld>
+  <p:clrMapOvr>
+    <a:masterClrMapping/>
+  </p:clrMapOvr>
+</p:sld>
+</file>
+
+<file path=ppt/slides/slide19.xml><?xml version="1.0" encoding="utf-8"?>
+<p:sld xmlns:a="http://schemas.openxmlformats.org/drawingml/2006/main" xmlns:p="http://schemas.openxmlformats.org/presentationml/2006/main" xmlns:r="http://schemas.openxmlformats.org/officeDocument/2006/relationships">
+  <p:cSld>
+    <p:spTree>
+      <p:nvGrpSpPr>
+        <p:cNvPr id="1" name=""/>
+        <p:cNvGrpSpPr/>
+        <p:nvPr/>
+      </p:nvGrpSpPr>
+      <p:grpSpPr/>
+      <p:sp>
+        <p:nvSpPr>
+          <p:cNvPr id="2" name="Rectangle 1"/>
+          <p:cNvSpPr/>
+          <p:nvPr/>
+        </p:nvSpPr>
+        <p:spPr>
+          <a:xfrm>
+            <a:off x="0" y="0"/>
+            <a:ext cx="12191695" cy="91440"/>
+          </a:xfrm>
+          <a:prstGeom prst="rect">
+            <a:avLst/>
+          </a:prstGeom>
+          <a:solidFill>
+            <a:srgbClr val="1A3B5C"/>
+          </a:solidFill>
+          <a:ln>
+            <a:noFill/>
+          </a:ln>
+        </p:spPr>
+        <p:style>
+          <a:lnRef idx="1">
+            <a:schemeClr val="accent1"/>
+          </a:lnRef>
+          <a:fillRef idx="3">
+            <a:schemeClr val="accent1"/>
+          </a:fillRef>
+          <a:effectRef idx="2">
+            <a:schemeClr val="accent1"/>
+          </a:effectRef>
+          <a:fontRef idx="minor">
+            <a:schemeClr val="lt1"/>
+          </a:fontRef>
+        </p:style>
+        <p:txBody>
+          <a:bodyPr rtlCol="0" anchor="ctr"/>
+          <a:lstStyle/>
+          <a:p>
+            <a:pPr algn="ctr"/>
+          </a:p>
+        </p:txBody>
+      </p:sp>
+      <p:sp>
+        <p:nvSpPr>
+          <p:cNvPr id="3" name="TextBox 2"/>
+          <p:cNvSpPr txBox="1"/>
+          <p:nvPr/>
+        </p:nvSpPr>
+        <p:spPr>
+          <a:xfrm>
+            <a:off x="457200" y="228600"/>
+            <a:ext cx="11277295" cy="640080"/>
+          </a:xfrm>
+          <a:prstGeom prst="rect">
+            <a:avLst/>
+          </a:prstGeom>
+          <a:noFill/>
+        </p:spPr>
+        <p:txBody>
+          <a:bodyPr wrap="square" anchor="t" lIns="0" rIns="0" tIns="0" bIns="0">
+            <a:spAutoFit/>
+          </a:bodyPr>
+          <a:lstStyle/>
+          <a:p>
+            <a:pPr algn="l"/>
+            <a:r>
+              <a:rPr sz="3000" b="1">
+                <a:solidFill>
+                  <a:srgbClr val="1A3B5C"/>
+                </a:solidFill>
+                <a:latin typeface="Calibri"/>
+              </a:rPr>
+              <a:t>Finding 4: lottery breaches track 5/N</a:t>
+            </a:r>
+          </a:p>
+        </p:txBody>
+      </p:sp>
+      <p:sp>
+        <p:nvSpPr>
+          <p:cNvPr id="4" name="TextBox 3"/>
+          <p:cNvSpPr txBox="1"/>
+          <p:nvPr/>
+        </p:nvSpPr>
+        <p:spPr>
+          <a:xfrm>
+            <a:off x="457200" y="868680"/>
+            <a:ext cx="11277295" cy="365760"/>
+          </a:xfrm>
+          <a:prstGeom prst="rect">
+            <a:avLst/>
+          </a:prstGeom>
+          <a:noFill/>
+        </p:spPr>
+        <p:txBody>
+          <a:bodyPr wrap="square" anchor="t" lIns="0" rIns="0" tIns="0" bIns="0">
+            <a:spAutoFit/>
+          </a:bodyPr>
+          <a:lstStyle/>
+          <a:p>
+            <a:pPr algn="l"/>
+            <a:r>
+              <a:rPr sz="1600" b="0">
+                <a:solidFill>
+                  <a:srgbClr val="6A6A6A"/>
+                </a:solidFill>
+                <a:latin typeface="Calibri"/>
+              </a:rPr>
+              <a:t>Defenses gated on N=5 failures leak when password lands in attempts 1-5</a:t>
+            </a:r>
+          </a:p>
+        </p:txBody>
+      </p:sp>
+      <p:pic>
+        <p:nvPicPr>
+          <p:cNvPr id="5" name="Picture 4" descr="chart_breach_scaling.png"/>
+          <p:cNvPicPr>
+            <a:picLocks noChangeAspect="1"/>
+          </p:cNvPicPr>
+          <p:nvPr/>
+        </p:nvPicPr>
+        <p:blipFill>
+          <a:blip r:embed="rId2"/>
+          <a:stretch>
+            <a:fillRect/>
+          </a:stretch>
+        </p:blipFill>
+        <p:spPr>
+          <a:xfrm>
+            <a:off x="365760" y="1463040"/>
+            <a:ext cx="7863840" cy="4206240"/>
+          </a:xfrm>
+          <a:prstGeom prst="rect">
+            <a:avLst/>
+          </a:prstGeom>
+        </p:spPr>
+      </p:pic>
+      <p:sp>
+        <p:nvSpPr>
+          <p:cNvPr id="6" name="TextBox 5"/>
+          <p:cNvSpPr txBox="1"/>
+          <p:nvPr/>
+        </p:nvSpPr>
+        <p:spPr>
+          <a:xfrm>
+            <a:off x="8412480" y="1645920"/>
+            <a:ext cx="3657600" cy="4572000"/>
+          </a:xfrm>
+          <a:prstGeom prst="rect">
+            <a:avLst/>
+          </a:prstGeom>
+          <a:noFill/>
+        </p:spPr>
+        <p:txBody>
+          <a:bodyPr wrap="square" lIns="0" rIns="0">
+            <a:spAutoFit/>
+          </a:bodyPr>
+          <a:lstStyle/>
+          <a:p>
+            <a:pPr algn="l">
+              <a:lnSpc>
+                <a:spcPct val="115000"/>
+              </a:lnSpc>
+            </a:pPr>
+            <a:r>
+              <a:rPr sz="1300" b="1">
+                <a:solidFill>
+                  <a:srgbClr val="1A3B5C"/>
+                </a:solidFill>
+                <a:latin typeface="Calibri"/>
+              </a:rPr>
+              <a:t>• </a:t>
+            </a:r>
+            <a:r>
+              <a:rPr sz="1300">
+                <a:solidFill>
+                  <a:srgbClr val="1F1F1F"/>
+                </a:solidFill>
+                <a:latin typeface="Calibri"/>
+              </a:rPr>
+              <a:t>100-word: 5/100 = 5% expected, 2-4% observed</a:t>
+            </a:r>
+          </a:p>
+          <a:p>
+            <a:pPr algn="l">
+              <a:lnSpc>
+                <a:spcPct val="115000"/>
+              </a:lnSpc>
+            </a:pPr>
+            <a:r>
+              <a:rPr sz="1300" b="1">
+                <a:solidFill>
+                  <a:srgbClr val="1A3B5C"/>
+                </a:solidFill>
+                <a:latin typeface="Calibri"/>
+              </a:rPr>
+              <a:t>• </a:t>
+            </a:r>
+            <a:r>
+              <a:rPr sz="1300">
+                <a:solidFill>
+                  <a:srgbClr val="1F1F1F"/>
+                </a:solidFill>
+                <a:latin typeface="Calibri"/>
+              </a:rPr>
+              <a:t>200-word: 5/200 = 2.5%, 2% observed</a:t>
+            </a:r>
+          </a:p>
+          <a:p>
+            <a:pPr algn="l">
+              <a:lnSpc>
+                <a:spcPct val="115000"/>
+              </a:lnSpc>
+            </a:pPr>
+            <a:r>
+              <a:rPr sz="1300" b="1">
+                <a:solidFill>
+                  <a:srgbClr val="1A3B5C"/>
+                </a:solidFill>
+                <a:latin typeface="Calibri"/>
+              </a:rPr>
+              <a:t>• </a:t>
+            </a:r>
+            <a:r>
+              <a:rPr sz="1300">
+                <a:solidFill>
+                  <a:srgbClr val="1F1F1F"/>
+                </a:solidFill>
+                <a:latin typeface="Calibri"/>
+              </a:rPr>
+              <a:t>300-word: 5/300 = 1.7%, 0% observed (sampling noise)</a:t>
+            </a:r>
+          </a:p>
+          <a:p>
+            <a:pPr algn="l">
+              <a:lnSpc>
+                <a:spcPct val="115000"/>
+              </a:lnSpc>
+            </a:pPr>
+            <a:r>
+              <a:rPr sz="1300" b="1">
+                <a:solidFill>
+                  <a:srgbClr val="1A3B5C"/>
+                </a:solidFill>
+                <a:latin typeface="Calibri"/>
+              </a:rPr>
+              <a:t>• </a:t>
+            </a:r>
+            <a:r>
+              <a:rPr sz="1300">
+                <a:solidFill>
+                  <a:srgbClr val="1F1F1F"/>
+                </a:solidFill>
+                <a:latin typeface="Calibri"/>
+              </a:rPr>
+              <a:t>500-word: 5/500 = 1%, 2-4% observed for some</a:t>
+            </a:r>
+          </a:p>
+          <a:p>
+            <a:pPr algn="l">
+              <a:lnSpc>
+                <a:spcPct val="115000"/>
+              </a:lnSpc>
+            </a:pPr>
+            <a:r>
+              <a:rPr sz="1300" b="1">
+                <a:solidFill>
+                  <a:srgbClr val="1A3B5C"/>
+                </a:solidFill>
+                <a:latin typeface="Calibri"/>
+              </a:rPr>
+              <a:t>• </a:t>
+            </a:r>
+            <a:r>
+              <a:rPr sz="1300">
+                <a:solidFill>
+                  <a:srgbClr val="1F1F1F"/>
+                </a:solidFill>
+                <a:latin typeface="Calibri"/>
+              </a:rPr>
+              <a:t>I_perma_ban gated on 8 fails - 8/N decays slower</a:t>
+            </a:r>
+          </a:p>
+        </p:txBody>
+      </p:sp>
+      <p:sp>
+        <p:nvSpPr>
+          <p:cNvPr id="7" name="Rectangle 6"/>
+          <p:cNvSpPr/>
+          <p:nvPr/>
+        </p:nvSpPr>
+        <p:spPr>
+          <a:xfrm>
+            <a:off x="548640" y="5943600"/>
+            <a:ext cx="11094415" cy="54864"/>
+          </a:xfrm>
+          <a:prstGeom prst="rect">
+            <a:avLst/>
+          </a:prstGeom>
+          <a:solidFill>
+            <a:srgbClr val="C87A00"/>
+          </a:solidFill>
+          <a:ln>
+            <a:noFill/>
+          </a:ln>
+        </p:spPr>
+        <p:style>
+          <a:lnRef idx="1">
+            <a:schemeClr val="accent1"/>
+          </a:lnRef>
+          <a:fillRef idx="3">
+            <a:schemeClr val="accent1"/>
+          </a:fillRef>
+          <a:effectRef idx="2">
+            <a:schemeClr val="accent1"/>
+          </a:effectRef>
+          <a:fontRef idx="minor">
+            <a:schemeClr val="lt1"/>
+          </a:fontRef>
+        </p:style>
+        <p:txBody>
+          <a:bodyPr rtlCol="0" anchor="ctr"/>
+          <a:lstStyle/>
+          <a:p>
+            <a:pPr algn="ctr"/>
+          </a:p>
+        </p:txBody>
+      </p:sp>
+      <p:sp>
+        <p:nvSpPr>
+          <p:cNvPr id="8" name="TextBox 7"/>
+          <p:cNvSpPr txBox="1"/>
+          <p:nvPr/>
+        </p:nvSpPr>
+        <p:spPr>
+          <a:xfrm>
+            <a:off x="548640" y="6126480"/>
+            <a:ext cx="11094415" cy="548640"/>
+          </a:xfrm>
+          <a:prstGeom prst="rect">
+            <a:avLst/>
+          </a:prstGeom>
+          <a:noFill/>
+        </p:spPr>
+        <p:txBody>
+          <a:bodyPr wrap="square" anchor="t" lIns="0" rIns="0" tIns="0" bIns="0">
+            <a:spAutoFit/>
+          </a:bodyPr>
+          <a:lstStyle/>
+          <a:p>
+            <a:pPr algn="l"/>
+            <a:r>
+              <a:rPr sz="1400" b="1">
+                <a:solidFill>
+                  <a:srgbClr val="1F1F1F"/>
+                </a:solidFill>
+                <a:latin typeface="Calibri"/>
+              </a:rPr>
+              <a:t>Operational fix: pair gated defenses with one that's active from request 1 (slow hash, honeypot, anomaly).</a:t>
+            </a:r>
+          </a:p>
+        </p:txBody>
+      </p:sp>
+    </p:spTree>
+  </p:cSld>
+  <p:clrMapOvr>
+    <a:masterClrMapping/>
+  </p:clrMapOvr>
+</p:sld>
+</file>
+
+<file path=ppt/slides/slide2.xml><?xml version="1.0" encoding="utf-8"?>
+<p:sld xmlns:a="http://schemas.openxmlformats.org/drawingml/2006/main" xmlns:p="http://schemas.openxmlformats.org/presentationml/2006/main" xmlns:r="http://schemas.openxmlformats.org/officeDocument/2006/relationships">
+  <p:cSld>
+    <p:spTree>
+      <p:nvGrpSpPr>
+        <p:cNvPr id="1" name=""/>
+        <p:cNvGrpSpPr/>
+        <p:nvPr/>
+      </p:nvGrpSpPr>
+      <p:grpSpPr/>
+      <p:sp>
+        <p:nvSpPr>
+          <p:cNvPr id="2" name="Rectangle 1"/>
+          <p:cNvSpPr/>
+          <p:nvPr/>
+        </p:nvSpPr>
+        <p:spPr>
+          <a:xfrm>
+            <a:off x="0" y="0"/>
+            <a:ext cx="12191695" cy="91440"/>
+          </a:xfrm>
+          <a:prstGeom prst="rect">
+            <a:avLst/>
+          </a:prstGeom>
+          <a:solidFill>
+            <a:srgbClr val="1A3B5C"/>
+          </a:solidFill>
+          <a:ln>
+            <a:noFill/>
+          </a:ln>
+        </p:spPr>
+        <p:style>
+          <a:lnRef idx="1">
+            <a:schemeClr val="accent1"/>
+          </a:lnRef>
+          <a:fillRef idx="3">
+            <a:schemeClr val="accent1"/>
+          </a:fillRef>
+          <a:effectRef idx="2">
+            <a:schemeClr val="accent1"/>
+          </a:effectRef>
+          <a:fontRef idx="minor">
+            <a:schemeClr val="lt1"/>
+          </a:fontRef>
+        </p:style>
+        <p:txBody>
+          <a:bodyPr rtlCol="0" anchor="ctr"/>
+          <a:lstStyle/>
+          <a:p>
+            <a:pPr algn="ctr"/>
+          </a:p>
+        </p:txBody>
+      </p:sp>
+      <p:sp>
+        <p:nvSpPr>
+          <p:cNvPr id="3" name="TextBox 2"/>
+          <p:cNvSpPr txBox="1"/>
+          <p:nvPr/>
+        </p:nvSpPr>
+        <p:spPr>
+          <a:xfrm>
+            <a:off x="457200" y="228600"/>
+            <a:ext cx="11277295" cy="640080"/>
+          </a:xfrm>
+          <a:prstGeom prst="rect">
+            <a:avLst/>
+          </a:prstGeom>
+          <a:noFill/>
+        </p:spPr>
+        <p:txBody>
+          <a:bodyPr wrap="square" anchor="t" lIns="0" rIns="0" tIns="0" bIns="0">
+            <a:spAutoFit/>
+          </a:bodyPr>
+          <a:lstStyle/>
+          <a:p>
+            <a:pPr algn="l"/>
+            <a:r>
+              <a:rPr sz="3000" b="1">
+                <a:solidFill>
+                  <a:srgbClr val="1A3B5C"/>
+                </a:solidFill>
+                <a:latin typeface="Calibri"/>
+              </a:rPr>
+              <a:t>The problem</a:t>
+            </a:r>
+          </a:p>
+        </p:txBody>
+      </p:sp>
+      <p:sp>
+        <p:nvSpPr>
+          <p:cNvPr id="4" name="TextBox 3"/>
+          <p:cNvSpPr txBox="1"/>
+          <p:nvPr/>
+        </p:nvSpPr>
+        <p:spPr>
+          <a:xfrm>
+            <a:off x="457200" y="868680"/>
+            <a:ext cx="11277295" cy="365760"/>
+          </a:xfrm>
+          <a:prstGeom prst="rect">
+            <a:avLst/>
+          </a:prstGeom>
+          <a:noFill/>
+        </p:spPr>
+        <p:txBody>
+          <a:bodyPr wrap="square" anchor="t" lIns="0" rIns="0" tIns="0" bIns="0">
+            <a:spAutoFit/>
+          </a:bodyPr>
+          <a:lstStyle/>
+          <a:p>
+            <a:pPr algn="l"/>
+            <a:r>
+              <a:rPr sz="1600" b="0">
+                <a:solidFill>
+                  <a:srgbClr val="6A6A6A"/>
+                </a:solidFill>
+                <a:latin typeface="Calibri"/>
+              </a:rPr>
+              <a:t>Why measure password-guessing defenses systematically</a:t>
+            </a:r>
+          </a:p>
+        </p:txBody>
+      </p:sp>
+      <p:sp>
+        <p:nvSpPr>
+          <p:cNvPr id="5" name="TextBox 4"/>
+          <p:cNvSpPr txBox="1"/>
+          <p:nvPr/>
+        </p:nvSpPr>
+        <p:spPr>
+          <a:xfrm>
+            <a:off x="548640" y="1554480"/>
+            <a:ext cx="11094415" cy="2286000"/>
+          </a:xfrm>
+          <a:prstGeom prst="rect">
+            <a:avLst/>
+          </a:prstGeom>
+          <a:noFill/>
+        </p:spPr>
+        <p:txBody>
+          <a:bodyPr wrap="square" lIns="0" rIns="0">
+            <a:spAutoFit/>
+          </a:bodyPr>
+          <a:lstStyle/>
+          <a:p>
+            <a:pPr algn="l">
+              <a:lnSpc>
+                <a:spcPct val="115000"/>
+              </a:lnSpc>
+            </a:pPr>
+            <a:r>
+              <a:rPr sz="1800" b="1">
+                <a:solidFill>
+                  <a:srgbClr val="1A3B5C"/>
+                </a:solidFill>
+                <a:latin typeface="Calibri"/>
+              </a:rPr>
+              <a:t>• </a:t>
+            </a:r>
+            <a:r>
+              <a:rPr sz="1800">
+                <a:solidFill>
+                  <a:srgbClr val="1F1F1F"/>
+                </a:solidFill>
+                <a:latin typeface="Calibri"/>
+              </a:rPr>
+              <a:t>Online password guessing is the single most common identity attack on the public Internet.</a:t>
+            </a:r>
+          </a:p>
+          <a:p>
+            <a:pPr algn="l">
+              <a:lnSpc>
+                <a:spcPct val="115000"/>
+              </a:lnSpc>
+            </a:pPr>
+            <a:r>
+              <a:rPr sz="1800" b="1">
+                <a:solidFill>
+                  <a:srgbClr val="1A3B5C"/>
+                </a:solidFill>
+                <a:latin typeface="Calibri"/>
+              </a:rPr>
+              <a:t>• </a:t>
+            </a:r>
+            <a:r>
+              <a:rPr sz="1800">
+                <a:solidFill>
+                  <a:srgbClr val="1F1F1F"/>
+                </a:solidFill>
+                <a:latin typeface="Calibri"/>
+              </a:rPr>
+              <a:t>Every authentication system ships a different mix of defenses:</a:t>
+            </a:r>
+          </a:p>
+          <a:p>
+            <a:pPr lvl="1" algn="l">
+              <a:lnSpc>
+                <a:spcPct val="115000"/>
+              </a:lnSpc>
+            </a:pPr>
+            <a:r>
+              <a:rPr sz="1800" b="1">
+                <a:solidFill>
+                  <a:srgbClr val="1A3B5C"/>
+                </a:solidFill>
+                <a:latin typeface="Calibri"/>
+              </a:rPr>
+              <a:t>- </a:t>
+            </a:r>
+            <a:r>
+              <a:rPr sz="1800">
+                <a:solidFill>
+                  <a:srgbClr val="1F1F1F"/>
+                </a:solidFill>
+                <a:latin typeface="Calibri"/>
+              </a:rPr>
+              <a:t>account lockout, IP rate limiting, progressive delays, CAPTCHAs, MFA, anomaly detection, bot filters …</a:t>
+            </a:r>
+          </a:p>
+          <a:p>
+            <a:pPr algn="l">
+              <a:lnSpc>
+                <a:spcPct val="115000"/>
+              </a:lnSpc>
+            </a:pPr>
+            <a:r>
+              <a:rPr sz="1800" b="1">
+                <a:solidFill>
+                  <a:srgbClr val="1A3B5C"/>
+                </a:solidFill>
+                <a:latin typeface="Calibri"/>
+              </a:rPr>
+              <a:t>• </a:t>
+            </a:r>
+            <a:r>
+              <a:rPr sz="1800">
+                <a:solidFill>
+                  <a:srgbClr val="1F1F1F"/>
+                </a:solidFill>
+                <a:latin typeface="Calibri"/>
+              </a:rPr>
+              <a:t>These defenses interact in non-obvious ways and are often misconfigured.</a:t>
+            </a:r>
+          </a:p>
+        </p:txBody>
+      </p:sp>
+      <p:sp>
+        <p:nvSpPr>
+          <p:cNvPr id="6" name="Rectangle 5"/>
+          <p:cNvSpPr/>
+          <p:nvPr/>
+        </p:nvSpPr>
+        <p:spPr>
+          <a:xfrm>
+            <a:off x="548640" y="3840480"/>
+            <a:ext cx="11094415" cy="54864"/>
+          </a:xfrm>
+          <a:prstGeom prst="rect">
+            <a:avLst/>
+          </a:prstGeom>
+          <a:solidFill>
+            <a:srgbClr val="D33636"/>
+          </a:solidFill>
+          <a:ln>
+            <a:noFill/>
+          </a:ln>
+        </p:spPr>
+        <p:style>
+          <a:lnRef idx="1">
+            <a:schemeClr val="accent1"/>
+          </a:lnRef>
+          <a:fillRef idx="3">
+            <a:schemeClr val="accent1"/>
+          </a:fillRef>
+          <a:effectRef idx="2">
+            <a:schemeClr val="accent1"/>
+          </a:effectRef>
+          <a:fontRef idx="minor">
+            <a:schemeClr val="lt1"/>
+          </a:fontRef>
+        </p:style>
+        <p:txBody>
+          <a:bodyPr rtlCol="0" anchor="ctr"/>
+          <a:lstStyle/>
+          <a:p>
+            <a:pPr algn="ctr"/>
+          </a:p>
+        </p:txBody>
+      </p:sp>
+      <p:sp>
+        <p:nvSpPr>
+          <p:cNvPr id="7" name="TextBox 6"/>
+          <p:cNvSpPr txBox="1"/>
+          <p:nvPr/>
+        </p:nvSpPr>
+        <p:spPr>
+          <a:xfrm>
+            <a:off x="548640" y="4023360"/>
+            <a:ext cx="11094415" cy="1828800"/>
+          </a:xfrm>
+          <a:prstGeom prst="rect">
+            <a:avLst/>
+          </a:prstGeom>
+          <a:noFill/>
+        </p:spPr>
+        <p:txBody>
+          <a:bodyPr wrap="square" lIns="0" rIns="0">
+            <a:spAutoFit/>
+          </a:bodyPr>
+          <a:lstStyle/>
+          <a:p>
+            <a:pPr algn="l">
+              <a:lnSpc>
+                <a:spcPct val="115000"/>
+              </a:lnSpc>
+            </a:pPr>
+            <a:r>
+              <a:rPr sz="1800" b="1">
+                <a:solidFill>
+                  <a:srgbClr val="D33636"/>
+                </a:solidFill>
+                <a:latin typeface="Calibri"/>
+              </a:rPr>
+              <a:t>• </a:t>
+            </a:r>
+            <a:r>
+              <a:rPr sz="1800">
+                <a:solidFill>
+                  <a:srgbClr val="1F1F1F"/>
+                </a:solidFill>
+                <a:latin typeface="Calibri"/>
+              </a:rPr>
+              <a:t>Question: how do these defenses actually compare under controlled, repeatable measurement?</a:t>
+            </a:r>
+          </a:p>
+          <a:p>
+            <a:pPr algn="l">
+              <a:lnSpc>
+                <a:spcPct val="115000"/>
+              </a:lnSpc>
+            </a:pPr>
+            <a:r>
+              <a:rPr sz="1800" b="1">
+                <a:solidFill>
+                  <a:srgbClr val="D33636"/>
+                </a:solidFill>
+                <a:latin typeface="Calibri"/>
+              </a:rPr>
+              <a:t>• </a:t>
+            </a:r>
+            <a:r>
+              <a:rPr sz="1800">
+                <a:solidFill>
+                  <a:srgbClr val="1F1F1F"/>
+                </a:solidFill>
+                <a:latin typeface="Calibri"/>
+              </a:rPr>
+              <a:t>Goal: build attacker + target framework, drive each defense through hundreds of trials, produce a comparable security profile so two configurations can be argued about with data.</a:t>
+            </a:r>
+          </a:p>
+        </p:txBody>
+      </p:sp>
+    </p:spTree>
+  </p:cSld>
+  <p:clrMapOvr>
+    <a:masterClrMapping/>
+  </p:clrMapOvr>
+</p:sld>
+</file>
+
+<file path=ppt/slides/slide20.xml><?xml version="1.0" encoding="utf-8"?>
+<p:sld xmlns:a="http://schemas.openxmlformats.org/drawingml/2006/main" xmlns:p="http://schemas.openxmlformats.org/presentationml/2006/main" xmlns:r="http://schemas.openxmlformats.org/officeDocument/2006/relationships">
+  <p:cSld>
+    <p:spTree>
+      <p:nvGrpSpPr>
+        <p:cNvPr id="1" name=""/>
+        <p:cNvGrpSpPr/>
+        <p:nvPr/>
+      </p:nvGrpSpPr>
+      <p:grpSpPr/>
+      <p:sp>
+        <p:nvSpPr>
+          <p:cNvPr id="2" name="Rectangle 1"/>
+          <p:cNvSpPr/>
+          <p:nvPr/>
+        </p:nvSpPr>
+        <p:spPr>
+          <a:xfrm>
+            <a:off x="0" y="0"/>
+            <a:ext cx="12191695" cy="91440"/>
+          </a:xfrm>
+          <a:prstGeom prst="rect">
+            <a:avLst/>
+          </a:prstGeom>
+          <a:solidFill>
+            <a:srgbClr val="1A3B5C"/>
+          </a:solidFill>
+          <a:ln>
+            <a:noFill/>
+          </a:ln>
+        </p:spPr>
+        <p:style>
+          <a:lnRef idx="1">
+            <a:schemeClr val="accent1"/>
+          </a:lnRef>
+          <a:fillRef idx="3">
+            <a:schemeClr val="accent1"/>
+          </a:fillRef>
+          <a:effectRef idx="2">
+            <a:schemeClr val="accent1"/>
+          </a:effectRef>
+          <a:fontRef idx="minor">
+            <a:schemeClr val="lt1"/>
+          </a:fontRef>
+        </p:style>
+        <p:txBody>
+          <a:bodyPr rtlCol="0" anchor="ctr"/>
+          <a:lstStyle/>
+          <a:p>
+            <a:pPr algn="ctr"/>
+          </a:p>
+        </p:txBody>
+      </p:sp>
+      <p:sp>
+        <p:nvSpPr>
+          <p:cNvPr id="3" name="TextBox 2"/>
+          <p:cNvSpPr txBox="1"/>
+          <p:nvPr/>
+        </p:nvSpPr>
+        <p:spPr>
+          <a:xfrm>
+            <a:off x="457200" y="228600"/>
+            <a:ext cx="11277295" cy="640080"/>
+          </a:xfrm>
+          <a:prstGeom prst="rect">
+            <a:avLst/>
+          </a:prstGeom>
+          <a:noFill/>
+        </p:spPr>
+        <p:txBody>
+          <a:bodyPr wrap="square" anchor="t" lIns="0" rIns="0" tIns="0" bIns="0">
+            <a:spAutoFit/>
+          </a:bodyPr>
+          <a:lstStyle/>
+          <a:p>
+            <a:pPr algn="l"/>
+            <a:r>
+              <a:rPr sz="3000" b="1">
+                <a:solidFill>
+                  <a:srgbClr val="1A3B5C"/>
+                </a:solidFill>
+                <a:latin typeface="Calibri"/>
+              </a:rPr>
+              <a:t>Layered defense converges</a:t>
+            </a:r>
+          </a:p>
+        </p:txBody>
+      </p:sp>
+      <p:sp>
+        <p:nvSpPr>
+          <p:cNvPr id="4" name="TextBox 3"/>
+          <p:cNvSpPr txBox="1"/>
+          <p:nvPr/>
+        </p:nvSpPr>
+        <p:spPr>
+          <a:xfrm>
+            <a:off x="457200" y="868680"/>
+            <a:ext cx="11277295" cy="365760"/>
+          </a:xfrm>
+          <a:prstGeom prst="rect">
+            <a:avLst/>
+          </a:prstGeom>
+          <a:noFill/>
+        </p:spPr>
+        <p:txBody>
+          <a:bodyPr wrap="square" anchor="t" lIns="0" rIns="0" tIns="0" bIns="0">
+            <a:spAutoFit/>
+          </a:bodyPr>
+          <a:lstStyle/>
+          <a:p>
+            <a:pPr algn="l"/>
+            <a:r>
+              <a:rPr sz="1600" b="0">
+                <a:solidFill>
+                  <a:srgbClr val="6A6A6A"/>
+                </a:solidFill>
+                <a:latin typeface="Calibri"/>
+              </a:rPr>
+              <a:t>Account lockout dominates - the rest are insurance for when it fails</a:t>
             </a:r>
           </a:p>
         </p:txBody>
@@ -7138,7 +9223,7 @@
                           </a:solidFill>
                           <a:latin typeface="Calibri"/>
                         </a:rPr>
-                        <a:t>30s</a:t>
+                        <a:t>26.8s</a:t>
                       </a:r>
                     </a:p>
                   </a:txBody>
@@ -7157,11 +9242,11 @@
                       <a:r>
                         <a:rPr sz="1400">
                           <a:solidFill>
-                            <a:srgbClr val="2D8F5A"/>
-                          </a:solidFill>
-                          <a:latin typeface="Calibri"/>
-                        </a:rPr>
-                        <a:t>0%</a:t>
+                            <a:srgbClr val="C87A00"/>
+                          </a:solidFill>
+                          <a:latin typeface="Calibri"/>
+                        </a:rPr>
+                        <a:t>2%</a:t>
                       </a:r>
                     </a:p>
                   </a:txBody>
@@ -7232,7 +9317,7 @@
                           </a:solidFill>
                           <a:latin typeface="Calibri"/>
                         </a:rPr>
-                        <a:t>30s</a:t>
+                        <a:t>30.4s</a:t>
                       </a:r>
                     </a:p>
                   </a:txBody>
@@ -7251,11 +9336,11 @@
                       <a:r>
                         <a:rPr sz="1400">
                           <a:solidFill>
-                            <a:srgbClr val="2D8F5A"/>
-                          </a:solidFill>
-                          <a:latin typeface="Calibri"/>
-                        </a:rPr>
-                        <a:t>0%</a:t>
+                            <a:srgbClr val="C87A00"/>
+                          </a:solidFill>
+                          <a:latin typeface="Calibri"/>
+                        </a:rPr>
+                        <a:t>2%</a:t>
                       </a:r>
                     </a:p>
                   </a:txBody>
@@ -7326,7 +9411,7 @@
                           </a:solidFill>
                           <a:latin typeface="Calibri"/>
                         </a:rPr>
-                        <a:t>30s</a:t>
+                        <a:t>30.1s</a:t>
                       </a:r>
                     </a:p>
                   </a:txBody>
@@ -7345,11 +9430,11 @@
                       <a:r>
                         <a:rPr sz="1400">
                           <a:solidFill>
-                            <a:srgbClr val="2D8F5A"/>
-                          </a:solidFill>
-                          <a:latin typeface="Calibri"/>
-                        </a:rPr>
-                        <a:t>0%</a:t>
+                            <a:srgbClr val="C87A00"/>
+                          </a:solidFill>
+                          <a:latin typeface="Calibri"/>
+                        </a:rPr>
+                        <a:t>4%</a:t>
                       </a:r>
                     </a:p>
                   </a:txBody>
@@ -7435,7 +9520,7 @@
               </a:lnSpc>
             </a:pPr>
             <a:r>
-              <a:rPr sz="1600" b="1">
+              <a:rPr sz="1500" b="1">
                 <a:solidFill>
                   <a:srgbClr val="1A3B5C"/>
                 </a:solidFill>
@@ -7444,13 +9529,13 @@
               <a:t>• </a:t>
             </a:r>
             <a:r>
-              <a:rPr sz="1600">
+              <a:rPr sz="1500">
                 <a:solidFill>
                   <a:srgbClr val="1F1F1F"/>
                 </a:solidFill>
                 <a:latin typeface="Calibri"/>
               </a:rPr>
-              <a:t>Identical wall-clock, identical 0% breach across all three layered configs.</a:t>
+              <a:t>Wall-clock is dominated by account lockout - other defenses never get exercised.</a:t>
             </a:r>
           </a:p>
           <a:p>
@@ -7460,7 +9545,7 @@
               </a:lnSpc>
             </a:pPr>
             <a:r>
-              <a:rPr sz="1600" b="1">
+              <a:rPr sz="1500" b="1">
                 <a:solidFill>
                   <a:srgbClr val="1A3B5C"/>
                 </a:solidFill>
@@ -7469,13 +9554,13 @@
               <a:t>• </a:t>
             </a:r>
             <a:r>
-              <a:rPr sz="1600">
+              <a:rPr sz="1500">
                 <a:solidFill>
                   <a:srgbClr val="1F1F1F"/>
                 </a:solidFill>
                 <a:latin typeface="Calibri"/>
               </a:rPr>
-              <a:t>Account lockout fires at attempt 5 - other defenses never get exercised.</a:t>
+              <a:t>The 2-4% breach is the same lottery-window effect: password lands in attempts 1-5 before lockout activates.</a:t>
             </a:r>
           </a:p>
           <a:p>
@@ -7485,7 +9570,7 @@
               </a:lnSpc>
             </a:pPr>
             <a:r>
-              <a:rPr sz="1600" b="1">
+              <a:rPr sz="1500" b="1">
                 <a:solidFill>
                   <a:srgbClr val="1A3B5C"/>
                 </a:solidFill>
@@ -7494,7 +9579,7 @@
               <a:t>• </a:t>
             </a:r>
             <a:r>
-              <a:rPr sz="1600">
+              <a:rPr sz="1500">
                 <a:solidFill>
                   <a:srgbClr val="1F1F1F"/>
                 </a:solidFill>
@@ -7510,7 +9595,7 @@
               </a:lnSpc>
             </a:pPr>
             <a:r>
-              <a:rPr sz="1600" b="1">
+              <a:rPr sz="1500" b="1">
                 <a:solidFill>
                   <a:srgbClr val="1A3B5C"/>
                 </a:solidFill>
@@ -7519,7 +9604,7 @@
               <a:t>• </a:t>
             </a:r>
             <a:r>
-              <a:rPr sz="1600">
+              <a:rPr sz="1500">
                 <a:solidFill>
                   <a:srgbClr val="1F1F1F"/>
                 </a:solidFill>
@@ -7538,7 +9623,7 @@
 </p:sld>
 </file>
 
-<file path=ppt/slides/slide18.xml><?xml version="1.0" encoding="utf-8"?>
+<file path=ppt/slides/slide21.xml><?xml version="1.0" encoding="utf-8"?>
 <p:sld xmlns:a="http://schemas.openxmlformats.org/drawingml/2006/main" xmlns:p="http://schemas.openxmlformats.org/presentationml/2006/main" xmlns:r="http://schemas.openxmlformats.org/officeDocument/2006/relationships">
   <p:cSld>
     <p:spTree>
@@ -7747,7 +9832,7 @@
 </p:sld>
 </file>
 
-<file path=ppt/slides/slide19.xml><?xml version="1.0" encoding="utf-8"?>
+<file path=ppt/slides/slide22.xml><?xml version="1.0" encoding="utf-8"?>
 <p:sld xmlns:a="http://schemas.openxmlformats.org/drawingml/2006/main" xmlns:p="http://schemas.openxmlformats.org/presentationml/2006/main" xmlns:r="http://schemas.openxmlformats.org/officeDocument/2006/relationships">
   <p:cSld>
     <p:spTree>
@@ -8212,7 +10297,7 @@
 </p:sld>
 </file>
 
-<file path=ppt/slides/slide2.xml><?xml version="1.0" encoding="utf-8"?>
+<file path=ppt/slides/slide23.xml><?xml version="1.0" encoding="utf-8"?>
 <p:sld xmlns:a="http://schemas.openxmlformats.org/drawingml/2006/main" xmlns:p="http://schemas.openxmlformats.org/presentationml/2006/main" xmlns:r="http://schemas.openxmlformats.org/officeDocument/2006/relationships">
   <p:cSld>
     <p:spTree>
@@ -8295,7 +10380,7 @@
                 </a:solidFill>
                 <a:latin typeface="Calibri"/>
               </a:rPr>
-              <a:t>The problem</a:t>
+              <a:t>Future work</a:t>
             </a:r>
           </a:p>
         </p:txBody>
@@ -8330,7 +10415,7 @@
                 </a:solidFill>
                 <a:latin typeface="Calibri"/>
               </a:rPr>
-              <a:t>Why measure password-guessing defenses systematically</a:t>
+              <a:t>Where the framework can be extended</a:t>
             </a:r>
           </a:p>
         </p:txBody>
@@ -8344,7 +10429,7 @@
         <p:spPr>
           <a:xfrm>
             <a:off x="548640" y="1554480"/>
-            <a:ext cx="11094415" cy="2286000"/>
+            <a:ext cx="11094415" cy="4572000"/>
           </a:xfrm>
           <a:prstGeom prst="rect">
             <a:avLst/>
@@ -8378,7 +10463,7 @@
                 </a:solidFill>
                 <a:latin typeface="Calibri"/>
               </a:rPr>
-              <a:t>Online password guessing is the single most common identity attack on the public Internet.</a:t>
+              <a:t>Distributed attacker - multi-IP, multi-process to expose IP-only defenses.</a:t>
             </a:r>
           </a:p>
           <a:p>
@@ -8403,32 +10488,7 @@
                 </a:solidFill>
                 <a:latin typeface="Calibri"/>
               </a:rPr>
-              <a:t>Every authentication system ships a different mix of defenses:</a:t>
-            </a:r>
-          </a:p>
-          <a:p>
-            <a:pPr lvl="1" algn="l">
-              <a:lnSpc>
-                <a:spcPct val="115000"/>
-              </a:lnSpc>
-            </a:pPr>
-            <a:r>
-              <a:rPr sz="1800" b="1">
-                <a:solidFill>
-                  <a:srgbClr val="1A3B5C"/>
-                </a:solidFill>
-                <a:latin typeface="Calibri"/>
-              </a:rPr>
-              <a:t>- </a:t>
-            </a:r>
-            <a:r>
-              <a:rPr sz="1800">
-                <a:solidFill>
-                  <a:srgbClr val="1F1F1F"/>
-                </a:solidFill>
-                <a:latin typeface="Calibri"/>
-              </a:rPr>
-              <a:t>account lockout, IP rate limiting, progressive delays, CAPTCHAs, MFA, anomaly detection, bot filters …</a:t>
+              <a:t>Cross-system comparison - point the same attack client at WordPress, Authelia, Gitea, Keycloak. The framework already speaks plain HTTP.</a:t>
             </a:r>
           </a:p>
           <a:p>
@@ -8453,75 +10513,9 @@
                 </a:solidFill>
                 <a:latin typeface="Calibri"/>
               </a:rPr>
-              <a:t>These defenses interact in non-obvious ways and are often misconfigured.</a:t>
-            </a:r>
-          </a:p>
-        </p:txBody>
-      </p:sp>
-      <p:sp>
-        <p:nvSpPr>
-          <p:cNvPr id="6" name="Rectangle 5"/>
-          <p:cNvSpPr/>
-          <p:nvPr/>
-        </p:nvSpPr>
-        <p:spPr>
-          <a:xfrm>
-            <a:off x="548640" y="3840480"/>
-            <a:ext cx="11094415" cy="54864"/>
-          </a:xfrm>
-          <a:prstGeom prst="rect">
-            <a:avLst/>
-          </a:prstGeom>
-          <a:solidFill>
-            <a:srgbClr val="D33636"/>
-          </a:solidFill>
-          <a:ln>
-            <a:noFill/>
-          </a:ln>
-        </p:spPr>
-        <p:style>
-          <a:lnRef idx="1">
-            <a:schemeClr val="accent1"/>
-          </a:lnRef>
-          <a:fillRef idx="3">
-            <a:schemeClr val="accent1"/>
-          </a:fillRef>
-          <a:effectRef idx="2">
-            <a:schemeClr val="accent1"/>
-          </a:effectRef>
-          <a:fontRef idx="minor">
-            <a:schemeClr val="lt1"/>
-          </a:fontRef>
-        </p:style>
-        <p:txBody>
-          <a:bodyPr rtlCol="0" anchor="ctr"/>
-          <a:lstStyle/>
-          <a:p>
-            <a:pPr algn="ctr"/>
-          </a:p>
-        </p:txBody>
-      </p:sp>
-      <p:sp>
-        <p:nvSpPr>
-          <p:cNvPr id="7" name="TextBox 6"/>
-          <p:cNvSpPr txBox="1"/>
-          <p:nvPr/>
-        </p:nvSpPr>
-        <p:spPr>
-          <a:xfrm>
-            <a:off x="548640" y="4023360"/>
-            <a:ext cx="11094415" cy="1828800"/>
-          </a:xfrm>
-          <a:prstGeom prst="rect">
-            <a:avLst/>
-          </a:prstGeom>
-          <a:noFill/>
-        </p:spPr>
-        <p:txBody>
-          <a:bodyPr wrap="square" lIns="0" rIns="0">
-            <a:spAutoFit/>
-          </a:bodyPr>
-          <a:lstStyle/>
+              <a:t>Adaptive attackers - observe response timing and codes, switch strategy mid-run.</a:t>
+            </a:r>
+          </a:p>
           <a:p>
             <a:pPr algn="l">
               <a:lnSpc>
@@ -8531,7 +10525,7 @@
             <a:r>
               <a:rPr sz="1800" b="1">
                 <a:solidFill>
-                  <a:srgbClr val="D33636"/>
+                  <a:srgbClr val="1A3B5C"/>
                 </a:solidFill>
                 <a:latin typeface="Calibri"/>
               </a:rPr>
@@ -8544,7 +10538,7 @@
                 </a:solidFill>
                 <a:latin typeface="Calibri"/>
               </a:rPr>
-              <a:t>Question: how do these defenses actually compare under controlled, repeatable measurement?</a:t>
+              <a:t>Real CAPTCHA / MFA endpoints - replace magic-token stubs with hCaptcha or TOTP.</a:t>
             </a:r>
           </a:p>
           <a:p>
@@ -8556,7 +10550,7 @@
             <a:r>
               <a:rPr sz="1800" b="1">
                 <a:solidFill>
-                  <a:srgbClr val="D33636"/>
+                  <a:srgbClr val="1A3B5C"/>
                 </a:solidFill>
                 <a:latin typeface="Calibri"/>
               </a:rPr>
@@ -8569,7 +10563,7 @@
                 </a:solidFill>
                 <a:latin typeface="Calibri"/>
               </a:rPr>
-              <a:t>Goal: build attacker + target framework, drive each defense through hundreds of trials, produce a comparable security profile so two configurations can be argued about with data.</a:t>
+              <a:t>Cost modeling - translate "13x slowdown" into dollar cost per credential at cloud-attacker rates.</a:t>
             </a:r>
           </a:p>
         </p:txBody>
@@ -8582,286 +10576,7 @@
 </p:sld>
 </file>
 
-<file path=ppt/slides/slide20.xml><?xml version="1.0" encoding="utf-8"?>
-<p:sld xmlns:a="http://schemas.openxmlformats.org/drawingml/2006/main" xmlns:p="http://schemas.openxmlformats.org/presentationml/2006/main" xmlns:r="http://schemas.openxmlformats.org/officeDocument/2006/relationships">
-  <p:cSld>
-    <p:spTree>
-      <p:nvGrpSpPr>
-        <p:cNvPr id="1" name=""/>
-        <p:cNvGrpSpPr/>
-        <p:nvPr/>
-      </p:nvGrpSpPr>
-      <p:grpSpPr/>
-      <p:sp>
-        <p:nvSpPr>
-          <p:cNvPr id="2" name="Rectangle 1"/>
-          <p:cNvSpPr/>
-          <p:nvPr/>
-        </p:nvSpPr>
-        <p:spPr>
-          <a:xfrm>
-            <a:off x="0" y="0"/>
-            <a:ext cx="12191695" cy="91440"/>
-          </a:xfrm>
-          <a:prstGeom prst="rect">
-            <a:avLst/>
-          </a:prstGeom>
-          <a:solidFill>
-            <a:srgbClr val="1A3B5C"/>
-          </a:solidFill>
-          <a:ln>
-            <a:noFill/>
-          </a:ln>
-        </p:spPr>
-        <p:style>
-          <a:lnRef idx="1">
-            <a:schemeClr val="accent1"/>
-          </a:lnRef>
-          <a:fillRef idx="3">
-            <a:schemeClr val="accent1"/>
-          </a:fillRef>
-          <a:effectRef idx="2">
-            <a:schemeClr val="accent1"/>
-          </a:effectRef>
-          <a:fontRef idx="minor">
-            <a:schemeClr val="lt1"/>
-          </a:fontRef>
-        </p:style>
-        <p:txBody>
-          <a:bodyPr rtlCol="0" anchor="ctr"/>
-          <a:lstStyle/>
-          <a:p>
-            <a:pPr algn="ctr"/>
-          </a:p>
-        </p:txBody>
-      </p:sp>
-      <p:sp>
-        <p:nvSpPr>
-          <p:cNvPr id="3" name="TextBox 2"/>
-          <p:cNvSpPr txBox="1"/>
-          <p:nvPr/>
-        </p:nvSpPr>
-        <p:spPr>
-          <a:xfrm>
-            <a:off x="457200" y="228600"/>
-            <a:ext cx="11277295" cy="640080"/>
-          </a:xfrm>
-          <a:prstGeom prst="rect">
-            <a:avLst/>
-          </a:prstGeom>
-          <a:noFill/>
-        </p:spPr>
-        <p:txBody>
-          <a:bodyPr wrap="square" anchor="t" lIns="0" rIns="0" tIns="0" bIns="0">
-            <a:spAutoFit/>
-          </a:bodyPr>
-          <a:lstStyle/>
-          <a:p>
-            <a:pPr algn="l"/>
-            <a:r>
-              <a:rPr sz="3000" b="1">
-                <a:solidFill>
-                  <a:srgbClr val="1A3B5C"/>
-                </a:solidFill>
-                <a:latin typeface="Calibri"/>
-              </a:rPr>
-              <a:t>Future work</a:t>
-            </a:r>
-          </a:p>
-        </p:txBody>
-      </p:sp>
-      <p:sp>
-        <p:nvSpPr>
-          <p:cNvPr id="4" name="TextBox 3"/>
-          <p:cNvSpPr txBox="1"/>
-          <p:nvPr/>
-        </p:nvSpPr>
-        <p:spPr>
-          <a:xfrm>
-            <a:off x="457200" y="868680"/>
-            <a:ext cx="11277295" cy="365760"/>
-          </a:xfrm>
-          <a:prstGeom prst="rect">
-            <a:avLst/>
-          </a:prstGeom>
-          <a:noFill/>
-        </p:spPr>
-        <p:txBody>
-          <a:bodyPr wrap="square" anchor="t" lIns="0" rIns="0" tIns="0" bIns="0">
-            <a:spAutoFit/>
-          </a:bodyPr>
-          <a:lstStyle/>
-          <a:p>
-            <a:pPr algn="l"/>
-            <a:r>
-              <a:rPr sz="1600" b="0">
-                <a:solidFill>
-                  <a:srgbClr val="6A6A6A"/>
-                </a:solidFill>
-                <a:latin typeface="Calibri"/>
-              </a:rPr>
-              <a:t>Where the framework can be extended</a:t>
-            </a:r>
-          </a:p>
-        </p:txBody>
-      </p:sp>
-      <p:sp>
-        <p:nvSpPr>
-          <p:cNvPr id="5" name="TextBox 4"/>
-          <p:cNvSpPr txBox="1"/>
-          <p:nvPr/>
-        </p:nvSpPr>
-        <p:spPr>
-          <a:xfrm>
-            <a:off x="548640" y="1554480"/>
-            <a:ext cx="11094415" cy="4572000"/>
-          </a:xfrm>
-          <a:prstGeom prst="rect">
-            <a:avLst/>
-          </a:prstGeom>
-          <a:noFill/>
-        </p:spPr>
-        <p:txBody>
-          <a:bodyPr wrap="square" lIns="0" rIns="0">
-            <a:spAutoFit/>
-          </a:bodyPr>
-          <a:lstStyle/>
-          <a:p>
-            <a:pPr algn="l">
-              <a:lnSpc>
-                <a:spcPct val="115000"/>
-              </a:lnSpc>
-            </a:pPr>
-            <a:r>
-              <a:rPr sz="1800" b="1">
-                <a:solidFill>
-                  <a:srgbClr val="1A3B5C"/>
-                </a:solidFill>
-                <a:latin typeface="Calibri"/>
-              </a:rPr>
-              <a:t>• </a:t>
-            </a:r>
-            <a:r>
-              <a:rPr sz="1800">
-                <a:solidFill>
-                  <a:srgbClr val="1F1F1F"/>
-                </a:solidFill>
-                <a:latin typeface="Calibri"/>
-              </a:rPr>
-              <a:t>Distributed attacker - multi-IP, multi-process to expose IP-only defenses.</a:t>
-            </a:r>
-          </a:p>
-          <a:p>
-            <a:pPr algn="l">
-              <a:lnSpc>
-                <a:spcPct val="115000"/>
-              </a:lnSpc>
-            </a:pPr>
-            <a:r>
-              <a:rPr sz="1800" b="1">
-                <a:solidFill>
-                  <a:srgbClr val="1A3B5C"/>
-                </a:solidFill>
-                <a:latin typeface="Calibri"/>
-              </a:rPr>
-              <a:t>• </a:t>
-            </a:r>
-            <a:r>
-              <a:rPr sz="1800">
-                <a:solidFill>
-                  <a:srgbClr val="1F1F1F"/>
-                </a:solidFill>
-                <a:latin typeface="Calibri"/>
-              </a:rPr>
-              <a:t>Cross-system comparison - point the same attack client at WordPress, Authelia, Gitea, Keycloak. The framework already speaks plain HTTP.</a:t>
-            </a:r>
-          </a:p>
-          <a:p>
-            <a:pPr algn="l">
-              <a:lnSpc>
-                <a:spcPct val="115000"/>
-              </a:lnSpc>
-            </a:pPr>
-            <a:r>
-              <a:rPr sz="1800" b="1">
-                <a:solidFill>
-                  <a:srgbClr val="1A3B5C"/>
-                </a:solidFill>
-                <a:latin typeface="Calibri"/>
-              </a:rPr>
-              <a:t>• </a:t>
-            </a:r>
-            <a:r>
-              <a:rPr sz="1800">
-                <a:solidFill>
-                  <a:srgbClr val="1F1F1F"/>
-                </a:solidFill>
-                <a:latin typeface="Calibri"/>
-              </a:rPr>
-              <a:t>Adaptive attackers - observe response timing and codes, switch strategy mid-run.</a:t>
-            </a:r>
-          </a:p>
-          <a:p>
-            <a:pPr algn="l">
-              <a:lnSpc>
-                <a:spcPct val="115000"/>
-              </a:lnSpc>
-            </a:pPr>
-            <a:r>
-              <a:rPr sz="1800" b="1">
-                <a:solidFill>
-                  <a:srgbClr val="1A3B5C"/>
-                </a:solidFill>
-                <a:latin typeface="Calibri"/>
-              </a:rPr>
-              <a:t>• </a:t>
-            </a:r>
-            <a:r>
-              <a:rPr sz="1800">
-                <a:solidFill>
-                  <a:srgbClr val="1F1F1F"/>
-                </a:solidFill>
-                <a:latin typeface="Calibri"/>
-              </a:rPr>
-              <a:t>Real CAPTCHA / MFA endpoints - replace magic-token stubs with hCaptcha or TOTP.</a:t>
-            </a:r>
-          </a:p>
-          <a:p>
-            <a:pPr algn="l">
-              <a:lnSpc>
-                <a:spcPct val="115000"/>
-              </a:lnSpc>
-            </a:pPr>
-            <a:r>
-              <a:rPr sz="1800" b="1">
-                <a:solidFill>
-                  <a:srgbClr val="1A3B5C"/>
-                </a:solidFill>
-                <a:latin typeface="Calibri"/>
-              </a:rPr>
-              <a:t>• </a:t>
-            </a:r>
-            <a:r>
-              <a:rPr sz="1800">
-                <a:solidFill>
-                  <a:srgbClr val="1F1F1F"/>
-                </a:solidFill>
-                <a:latin typeface="Calibri"/>
-              </a:rPr>
-              <a:t>Cost modeling - translate "13x slowdown" into dollar cost per credential at cloud-attacker rates.</a:t>
-            </a:r>
-          </a:p>
-        </p:txBody>
-      </p:sp>
-    </p:spTree>
-  </p:cSld>
-  <p:clrMapOvr>
-    <a:masterClrMapping/>
-  </p:clrMapOvr>
-</p:sld>
-</file>
-
-<file path=ppt/slides/slide21.xml><?xml version="1.0" encoding="utf-8"?>
+<file path=ppt/slides/slide24.xml><?xml version="1.0" encoding="utf-8"?>
 <p:sld xmlns:a="http://schemas.openxmlformats.org/drawingml/2006/main" xmlns:p="http://schemas.openxmlformats.org/presentationml/2006/main" xmlns:r="http://schemas.openxmlformats.org/officeDocument/2006/relationships">
   <p:cSld>
     <p:spTree>
@@ -10305,7 +12020,7 @@
                 </a:solidFill>
                 <a:latin typeface="Calibri"/>
               </a:rPr>
-              <a:t>Sample 100 entries from a real public password corpus.</a:t>
+              <a:t>Sample N entries from a real public password corpus (SecLists 10k).</a:t>
             </a:r>
           </a:p>
           <a:p>
@@ -10446,7 +12161,7 @@
                 </a:solidFill>
                 <a:latin typeface="Calibri"/>
               </a:rPr>
-              <a:t>5 trials per config x 22 configs = 110 attack runs in the headline experiment.</a:t>
+              <a:t>50 trials per config x 21 configs x 4 wordlist sizes (100 / 200 / 300 / 500) = 3,500+ trial measurements.</a:t>
             </a:r>
           </a:p>
           <a:p>
@@ -10471,7 +12186,7 @@
                 </a:solidFill>
                 <a:latin typeface="Calibri"/>
               </a:rPr>
-              <a:t>Same defense exercised against 5 different target depths gives a measurement distribution.</a:t>
+              <a:t>Each defense exercised against 50 randomized target depths per wordlist size.</a:t>
             </a:r>
           </a:p>
           <a:p>
@@ -10496,7 +12211,7 @@
                 </a:solidFill>
                 <a:latin typeface="Calibri"/>
               </a:rPr>
-              <a:t>Total wall-clock for the full sweep: about 57 minutes on a laptop.</a:t>
+              <a:t>Headline 100-word run finished in 13.7 hours; longer runs were stopped after the layered configs.</a:t>
             </a:r>
           </a:p>
         </p:txBody>
